--- a/content/W01/D1/C2_W01_D01_deck_00_intro_STUDENT.pptx
+++ b/content/W01/D1/C2_W01_D01_deck_00_intro_STUDENT.pptx
@@ -3720,7 +3720,7 @@
                 </a:solidFill>
                 <a:latin typeface="Calibri"/>
               </a:rPr>
-              <a:t>Compare with the person next to you and fix whichever box either of you missed. You will be drawing this again in Week 15.</a:t>
+              <a:t>Compare with the person next to you and fix whichever box either of you missed. By the end of this week you should be able to draw this from memory, because every example for the rest of the programme lands inside it.</a:t>
             </a:r>
           </a:p>
         </p:txBody>
@@ -4235,8 +4235,8 @@
         </p:nvSpPr>
         <p:spPr>
           <a:xfrm>
-            <a:off x="777240" y="1965960"/>
-            <a:ext cx="10607040" cy="4206240"/>
+            <a:off x="777240" y="1691640"/>
+            <a:ext cx="10607040" cy="502920"/>
           </a:xfrm>
           <a:prstGeom prst="rect">
             <a:avLst/>
@@ -4249,9 +4249,8 @@
           </a:bodyPr>
           <a:lstStyle/>
           <a:p>
-            <a:pPr algn="l"/>
-            <a:r>
-              <a:rPr b="0" sz="2100">
+            <a:r>
+              <a:rPr sz="1700" b="0">
                 <a:solidFill>
                   <a:srgbClr val="1C1C1A"/>
                 </a:solidFill>
@@ -4260,107 +4259,446 @@
               <a:t>Each phase is a promise about what you can do when it closes.</a:t>
             </a:r>
           </a:p>
-          <a:p>
-            <a:pPr algn="l"/>
-            <a:r>
-              <a:rPr b="0" sz="2100">
-                <a:solidFill>
-                  <a:srgbClr val="1C1C1A"/>
-                </a:solidFill>
-                <a:latin typeface="Calibri"/>
-              </a:rPr>
-              <a:t> </a:t>
-            </a:r>
-          </a:p>
-          <a:p>
-            <a:pPr algn="l"/>
-            <a:r>
-              <a:rPr b="0" sz="2100">
-                <a:solidFill>
-                  <a:srgbClr val="1C1C1A"/>
-                </a:solidFill>
-                <a:latin typeface="Calibri"/>
-              </a:rPr>
-              <a:t>| Phase | Weeks | What you can do when it closes |</a:t>
-            </a:r>
-          </a:p>
-          <a:p>
-            <a:pPr algn="l"/>
-            <a:r>
-              <a:rPr b="0" sz="2100">
-                <a:solidFill>
-                  <a:srgbClr val="1C1C1A"/>
-                </a:solidFill>
-                <a:latin typeface="Calibri"/>
-              </a:rPr>
-              <a:t>|---|---|---|</a:t>
-            </a:r>
-          </a:p>
-          <a:p>
-            <a:pPr algn="l"/>
-            <a:r>
-              <a:rPr b="0" sz="2100">
-                <a:solidFill>
-                  <a:srgbClr val="1C1C1A"/>
-                </a:solidFill>
-                <a:latin typeface="Calibri"/>
-              </a:rPr>
-              <a:t>| Genesis | 1 to 4 | You can take a file nobody prepared, clean it, query it in SQL, reshape it in pandas, and turn it into the metrics a business decision rests on. |</a:t>
-            </a:r>
-          </a:p>
-          <a:p>
-            <a:pPr algn="l"/>
-            <a:r>
-              <a:rPr b="0" sz="2100">
-                <a:solidFill>
-                  <a:srgbClr val="1C1C1A"/>
-                </a:solidFill>
-                <a:latin typeface="Calibri"/>
-              </a:rPr>
-              <a:t>| Forge | 5 to 8 | You can frame a problem as a model, train it, say honestly how well it works and where it fails, and explain what a language model does when it produces the next token. |</a:t>
-            </a:r>
-          </a:p>
-          <a:p>
-            <a:pPr algn="l"/>
-            <a:r>
-              <a:rPr b="0" sz="2100">
-                <a:solidFill>
-                  <a:srgbClr val="1C1C1A"/>
-                </a:solidFill>
-                <a:latin typeface="Calibri"/>
-              </a:rPr>
-              <a:t>| Ascent | 9 to 12 | You can build with a generative model and ship a retrieval assistant that answers from Kalpa's own documents and refuses when the documents do not answer. |</a:t>
-            </a:r>
-          </a:p>
-          <a:p>
-            <a:pPr algn="l"/>
-            <a:r>
-              <a:rPr b="0" sz="2100">
-                <a:solidFill>
-                  <a:srgbClr val="1C1C1A"/>
-                </a:solidFill>
-                <a:latin typeface="Calibri"/>
-              </a:rPr>
-              <a:t>| Build | 13 to 16 | You can build an agentic system that uses tools, and run it under production conditions where cost, latency and failure are measured. |</a:t>
-            </a:r>
-          </a:p>
-          <a:p>
-            <a:pPr algn="l"/>
-            <a:r>
-              <a:rPr b="0" sz="2100">
-                <a:solidFill>
-                  <a:srgbClr val="1C1C1A"/>
-                </a:solidFill>
-                <a:latin typeface="Calibri"/>
-              </a:rPr>
-              <a:t>| Launch | 17 to 20 | You can carry one problem from a brief to a working system and defend it in front of a panel. |</a:t>
-            </a:r>
-          </a:p>
-        </p:txBody>
-      </p:sp>
-      <p:sp>
-        <p:nvSpPr>
-          <p:cNvPr id="5" name="TextBox 4"/>
+        </p:txBody>
+      </p:sp>
+      <p:graphicFrame>
+        <p:nvGraphicFramePr>
+          <p:cNvPr id="5" name="Table 4"/>
+          <p:cNvGraphicFramePr>
+            <a:graphicFrameLocks noGrp="1"/>
+          </p:cNvGraphicFramePr>
+          <p:nvPr/>
+        </p:nvGraphicFramePr>
+        <p:xfrm>
+          <a:off x="777240" y="2286000"/>
+          <a:ext cx="10607040" cy="3520440"/>
+        </p:xfrm>
+        <a:graphic>
+          <a:graphicData uri="http://schemas.openxmlformats.org/drawingml/2006/table">
+            <a:tbl>
+              <a:tblPr firstRow="1" bandRow="1">
+                <a:tableStyleId>{5C22544A-7EE6-4342-B048-85BDC9FD1C3A}</a:tableStyleId>
+              </a:tblPr>
+              <a:tblGrid>
+                <a:gridCol w="2377440"/>
+                <a:gridCol w="4114800"/>
+                <a:gridCol w="4114800"/>
+              </a:tblGrid>
+              <a:tr h="586740">
+                <a:tc>
+                  <a:txBody>
+                    <a:bodyPr/>
+                    <a:lstStyle/>
+                    <a:p>
+                      <a:r>
+                        <a:rPr sz="1300" b="1">
+                          <a:solidFill>
+                            <a:srgbClr val="FFFFFF"/>
+                          </a:solidFill>
+                          <a:latin typeface="Calibri"/>
+                        </a:rPr>
+                        <a:t>Phase</a:t>
+                      </a:r>
+                    </a:p>
+                  </a:txBody>
+                  <a:tcPr marL="91440" marR="91440" marT="36576" marB="36576">
+                    <a:solidFill>
+                      <a:srgbClr val="2B4A7D"/>
+                    </a:solidFill>
+                  </a:tcPr>
+                </a:tc>
+                <a:tc>
+                  <a:txBody>
+                    <a:bodyPr/>
+                    <a:lstStyle/>
+                    <a:p>
+                      <a:r>
+                        <a:rPr sz="1300" b="1">
+                          <a:solidFill>
+                            <a:srgbClr val="FFFFFF"/>
+                          </a:solidFill>
+                          <a:latin typeface="Calibri"/>
+                        </a:rPr>
+                        <a:t>Weeks</a:t>
+                      </a:r>
+                    </a:p>
+                  </a:txBody>
+                  <a:tcPr marL="91440" marR="91440" marT="36576" marB="36576">
+                    <a:solidFill>
+                      <a:srgbClr val="2B4A7D"/>
+                    </a:solidFill>
+                  </a:tcPr>
+                </a:tc>
+                <a:tc>
+                  <a:txBody>
+                    <a:bodyPr/>
+                    <a:lstStyle/>
+                    <a:p>
+                      <a:r>
+                        <a:rPr sz="1300" b="1">
+                          <a:solidFill>
+                            <a:srgbClr val="FFFFFF"/>
+                          </a:solidFill>
+                          <a:latin typeface="Calibri"/>
+                        </a:rPr>
+                        <a:t>What you can do when it closes</a:t>
+                      </a:r>
+                    </a:p>
+                  </a:txBody>
+                  <a:tcPr marL="91440" marR="91440" marT="36576" marB="36576">
+                    <a:solidFill>
+                      <a:srgbClr val="2B4A7D"/>
+                    </a:solidFill>
+                  </a:tcPr>
+                </a:tc>
+              </a:tr>
+              <a:tr h="586740">
+                <a:tc>
+                  <a:txBody>
+                    <a:bodyPr/>
+                    <a:lstStyle/>
+                    <a:p>
+                      <a:r>
+                        <a:rPr sz="1300" b="0">
+                          <a:solidFill>
+                            <a:srgbClr val="1C1C1A"/>
+                          </a:solidFill>
+                          <a:latin typeface="Calibri"/>
+                        </a:rPr>
+                        <a:t>Genesis</a:t>
+                      </a:r>
+                    </a:p>
+                  </a:txBody>
+                  <a:tcPr marL="91440" marR="91440" marT="36576" marB="36576">
+                    <a:solidFill>
+                      <a:srgbClr val="F7F7F5"/>
+                    </a:solidFill>
+                  </a:tcPr>
+                </a:tc>
+                <a:tc>
+                  <a:txBody>
+                    <a:bodyPr/>
+                    <a:lstStyle/>
+                    <a:p>
+                      <a:r>
+                        <a:rPr sz="1300" b="0">
+                          <a:solidFill>
+                            <a:srgbClr val="1C1C1A"/>
+                          </a:solidFill>
+                          <a:latin typeface="Calibri"/>
+                        </a:rPr>
+                        <a:t>1 to 4</a:t>
+                      </a:r>
+                    </a:p>
+                  </a:txBody>
+                  <a:tcPr marL="91440" marR="91440" marT="36576" marB="36576">
+                    <a:solidFill>
+                      <a:srgbClr val="F7F7F5"/>
+                    </a:solidFill>
+                  </a:tcPr>
+                </a:tc>
+                <a:tc>
+                  <a:txBody>
+                    <a:bodyPr/>
+                    <a:lstStyle/>
+                    <a:p>
+                      <a:r>
+                        <a:rPr sz="1300" b="0">
+                          <a:solidFill>
+                            <a:srgbClr val="1C1C1A"/>
+                          </a:solidFill>
+                          <a:latin typeface="Calibri"/>
+                        </a:rPr>
+                        <a:t>You can take a file nobody prepared, clean it, query it in SQL, reshape it in pandas, and turn it into the metrics a business decision rests on.</a:t>
+                      </a:r>
+                    </a:p>
+                  </a:txBody>
+                  <a:tcPr marL="91440" marR="91440" marT="36576" marB="36576">
+                    <a:solidFill>
+                      <a:srgbClr val="F7F7F5"/>
+                    </a:solidFill>
+                  </a:tcPr>
+                </a:tc>
+              </a:tr>
+              <a:tr h="586740">
+                <a:tc>
+                  <a:txBody>
+                    <a:bodyPr/>
+                    <a:lstStyle/>
+                    <a:p>
+                      <a:r>
+                        <a:rPr sz="1300" b="0">
+                          <a:solidFill>
+                            <a:srgbClr val="1C1C1A"/>
+                          </a:solidFill>
+                          <a:latin typeface="Calibri"/>
+                        </a:rPr>
+                        <a:t>Forge</a:t>
+                      </a:r>
+                    </a:p>
+                  </a:txBody>
+                  <a:tcPr marL="91440" marR="91440" marT="36576" marB="36576">
+                    <a:solidFill>
+                      <a:srgbClr val="F7F7F5"/>
+                    </a:solidFill>
+                  </a:tcPr>
+                </a:tc>
+                <a:tc>
+                  <a:txBody>
+                    <a:bodyPr/>
+                    <a:lstStyle/>
+                    <a:p>
+                      <a:r>
+                        <a:rPr sz="1300" b="0">
+                          <a:solidFill>
+                            <a:srgbClr val="1C1C1A"/>
+                          </a:solidFill>
+                          <a:latin typeface="Calibri"/>
+                        </a:rPr>
+                        <a:t>5 to 8</a:t>
+                      </a:r>
+                    </a:p>
+                  </a:txBody>
+                  <a:tcPr marL="91440" marR="91440" marT="36576" marB="36576">
+                    <a:solidFill>
+                      <a:srgbClr val="F7F7F5"/>
+                    </a:solidFill>
+                  </a:tcPr>
+                </a:tc>
+                <a:tc>
+                  <a:txBody>
+                    <a:bodyPr/>
+                    <a:lstStyle/>
+                    <a:p>
+                      <a:r>
+                        <a:rPr sz="1300" b="0">
+                          <a:solidFill>
+                            <a:srgbClr val="1C1C1A"/>
+                          </a:solidFill>
+                          <a:latin typeface="Calibri"/>
+                        </a:rPr>
+                        <a:t>You can frame a problem as a model, train it, say honestly how well it works and where it fails, and explain what a language model does when it produces the next token.</a:t>
+                      </a:r>
+                    </a:p>
+                  </a:txBody>
+                  <a:tcPr marL="91440" marR="91440" marT="36576" marB="36576">
+                    <a:solidFill>
+                      <a:srgbClr val="F7F7F5"/>
+                    </a:solidFill>
+                  </a:tcPr>
+                </a:tc>
+              </a:tr>
+              <a:tr h="586740">
+                <a:tc>
+                  <a:txBody>
+                    <a:bodyPr/>
+                    <a:lstStyle/>
+                    <a:p>
+                      <a:r>
+                        <a:rPr sz="1300" b="0">
+                          <a:solidFill>
+                            <a:srgbClr val="1C1C1A"/>
+                          </a:solidFill>
+                          <a:latin typeface="Calibri"/>
+                        </a:rPr>
+                        <a:t>Ascent</a:t>
+                      </a:r>
+                    </a:p>
+                  </a:txBody>
+                  <a:tcPr marL="91440" marR="91440" marT="36576" marB="36576">
+                    <a:solidFill>
+                      <a:srgbClr val="F7F7F5"/>
+                    </a:solidFill>
+                  </a:tcPr>
+                </a:tc>
+                <a:tc>
+                  <a:txBody>
+                    <a:bodyPr/>
+                    <a:lstStyle/>
+                    <a:p>
+                      <a:r>
+                        <a:rPr sz="1300" b="0">
+                          <a:solidFill>
+                            <a:srgbClr val="1C1C1A"/>
+                          </a:solidFill>
+                          <a:latin typeface="Calibri"/>
+                        </a:rPr>
+                        <a:t>9 to 12</a:t>
+                      </a:r>
+                    </a:p>
+                  </a:txBody>
+                  <a:tcPr marL="91440" marR="91440" marT="36576" marB="36576">
+                    <a:solidFill>
+                      <a:srgbClr val="F7F7F5"/>
+                    </a:solidFill>
+                  </a:tcPr>
+                </a:tc>
+                <a:tc>
+                  <a:txBody>
+                    <a:bodyPr/>
+                    <a:lstStyle/>
+                    <a:p>
+                      <a:r>
+                        <a:rPr sz="1300" b="0">
+                          <a:solidFill>
+                            <a:srgbClr val="1C1C1A"/>
+                          </a:solidFill>
+                          <a:latin typeface="Calibri"/>
+                        </a:rPr>
+                        <a:t>You can build with a generative model and ship a retrieval assistant that answers from Kalpa's own documents and refuses when the documents do not answer.</a:t>
+                      </a:r>
+                    </a:p>
+                  </a:txBody>
+                  <a:tcPr marL="91440" marR="91440" marT="36576" marB="36576">
+                    <a:solidFill>
+                      <a:srgbClr val="F7F7F5"/>
+                    </a:solidFill>
+                  </a:tcPr>
+                </a:tc>
+              </a:tr>
+              <a:tr h="586740">
+                <a:tc>
+                  <a:txBody>
+                    <a:bodyPr/>
+                    <a:lstStyle/>
+                    <a:p>
+                      <a:r>
+                        <a:rPr sz="1300" b="0">
+                          <a:solidFill>
+                            <a:srgbClr val="1C1C1A"/>
+                          </a:solidFill>
+                          <a:latin typeface="Calibri"/>
+                        </a:rPr>
+                        <a:t>Build</a:t>
+                      </a:r>
+                    </a:p>
+                  </a:txBody>
+                  <a:tcPr marL="91440" marR="91440" marT="36576" marB="36576">
+                    <a:solidFill>
+                      <a:srgbClr val="F7F7F5"/>
+                    </a:solidFill>
+                  </a:tcPr>
+                </a:tc>
+                <a:tc>
+                  <a:txBody>
+                    <a:bodyPr/>
+                    <a:lstStyle/>
+                    <a:p>
+                      <a:r>
+                        <a:rPr sz="1300" b="0">
+                          <a:solidFill>
+                            <a:srgbClr val="1C1C1A"/>
+                          </a:solidFill>
+                          <a:latin typeface="Calibri"/>
+                        </a:rPr>
+                        <a:t>13 to 16</a:t>
+                      </a:r>
+                    </a:p>
+                  </a:txBody>
+                  <a:tcPr marL="91440" marR="91440" marT="36576" marB="36576">
+                    <a:solidFill>
+                      <a:srgbClr val="F7F7F5"/>
+                    </a:solidFill>
+                  </a:tcPr>
+                </a:tc>
+                <a:tc>
+                  <a:txBody>
+                    <a:bodyPr/>
+                    <a:lstStyle/>
+                    <a:p>
+                      <a:r>
+                        <a:rPr sz="1300" b="0">
+                          <a:solidFill>
+                            <a:srgbClr val="1C1C1A"/>
+                          </a:solidFill>
+                          <a:latin typeface="Calibri"/>
+                        </a:rPr>
+                        <a:t>You can build an agentic system that uses tools, and run it under production conditions where cost, latency and failure are measured.</a:t>
+                      </a:r>
+                    </a:p>
+                  </a:txBody>
+                  <a:tcPr marL="91440" marR="91440" marT="36576" marB="36576">
+                    <a:solidFill>
+                      <a:srgbClr val="F7F7F5"/>
+                    </a:solidFill>
+                  </a:tcPr>
+                </a:tc>
+              </a:tr>
+              <a:tr h="586740">
+                <a:tc>
+                  <a:txBody>
+                    <a:bodyPr/>
+                    <a:lstStyle/>
+                    <a:p>
+                      <a:r>
+                        <a:rPr sz="1300" b="0">
+                          <a:solidFill>
+                            <a:srgbClr val="1C1C1A"/>
+                          </a:solidFill>
+                          <a:latin typeface="Calibri"/>
+                        </a:rPr>
+                        <a:t>Launch</a:t>
+                      </a:r>
+                    </a:p>
+                  </a:txBody>
+                  <a:tcPr marL="91440" marR="91440" marT="36576" marB="36576">
+                    <a:solidFill>
+                      <a:srgbClr val="F7F7F5"/>
+                    </a:solidFill>
+                  </a:tcPr>
+                </a:tc>
+                <a:tc>
+                  <a:txBody>
+                    <a:bodyPr/>
+                    <a:lstStyle/>
+                    <a:p>
+                      <a:r>
+                        <a:rPr sz="1300" b="0">
+                          <a:solidFill>
+                            <a:srgbClr val="1C1C1A"/>
+                          </a:solidFill>
+                          <a:latin typeface="Calibri"/>
+                        </a:rPr>
+                        <a:t>17 to 20</a:t>
+                      </a:r>
+                    </a:p>
+                  </a:txBody>
+                  <a:tcPr marL="91440" marR="91440" marT="36576" marB="36576">
+                    <a:solidFill>
+                      <a:srgbClr val="F7F7F5"/>
+                    </a:solidFill>
+                  </a:tcPr>
+                </a:tc>
+                <a:tc>
+                  <a:txBody>
+                    <a:bodyPr/>
+                    <a:lstStyle/>
+                    <a:p>
+                      <a:r>
+                        <a:rPr sz="1300" b="0">
+                          <a:solidFill>
+                            <a:srgbClr val="1C1C1A"/>
+                          </a:solidFill>
+                          <a:latin typeface="Calibri"/>
+                        </a:rPr>
+                        <a:t>You can carry one problem from a brief to a working system and defend it in front of a panel.</a:t>
+                      </a:r>
+                    </a:p>
+                  </a:txBody>
+                  <a:tcPr marL="91440" marR="91440" marT="36576" marB="36576">
+                    <a:solidFill>
+                      <a:srgbClr val="F7F7F5"/>
+                    </a:solidFill>
+                  </a:tcPr>
+                </a:tc>
+              </a:tr>
+            </a:tbl>
+          </a:graphicData>
+        </a:graphic>
+      </p:graphicFrame>
+      <p:sp>
+        <p:nvSpPr>
+          <p:cNvPr id="6" name="TextBox 5"/>
           <p:cNvSpPr txBox="1"/>
           <p:nvPr/>
         </p:nvSpPr>
@@ -4518,7 +4856,7 @@
                 </a:solidFill>
                 <a:latin typeface="Calibri"/>
               </a:rPr>
-              <a:t>Build weeks fall at Weeks 3, 6, 9, 12 and 15. Every other week teaches.</a:t>
+              <a:t>Build weeks fall at Weeks 3, 6, 9, 12 and 15. Weeks 17 to 20 are the capstone weeks. Every other week teaches.</a:t>
             </a:r>
           </a:p>
           <a:p>
@@ -6597,16 +6935,272 @@
           </a:p>
         </p:txBody>
       </p:sp>
-      <p:sp>
-        <p:nvSpPr>
-          <p:cNvPr id="4" name="TextBox 3"/>
+      <p:graphicFrame>
+        <p:nvGraphicFramePr>
+          <p:cNvPr id="4" name="Table 3"/>
+          <p:cNvGraphicFramePr>
+            <a:graphicFrameLocks noGrp="1"/>
+          </p:cNvGraphicFramePr>
+          <p:nvPr/>
+        </p:nvGraphicFramePr>
+        <p:xfrm>
+          <a:off x="777240" y="1965960"/>
+          <a:ext cx="10607040" cy="3337560"/>
+        </p:xfrm>
+        <a:graphic>
+          <a:graphicData uri="http://schemas.openxmlformats.org/drawingml/2006/table">
+            <a:tbl>
+              <a:tblPr firstRow="1" bandRow="1">
+                <a:tableStyleId>{5C22544A-7EE6-4342-B048-85BDC9FD1C3A}</a:tableStyleId>
+              </a:tblPr>
+              <a:tblGrid>
+                <a:gridCol w="2377440"/>
+                <a:gridCol w="8229600"/>
+              </a:tblGrid>
+              <a:tr h="667512">
+                <a:tc>
+                  <a:txBody>
+                    <a:bodyPr/>
+                    <a:lstStyle/>
+                    <a:p>
+                      <a:r>
+                        <a:rPr sz="1300" b="1">
+                          <a:solidFill>
+                            <a:srgbClr val="FFFFFF"/>
+                          </a:solidFill>
+                          <a:latin typeface="Calibri"/>
+                        </a:rPr>
+                        <a:t>Platform</a:t>
+                      </a:r>
+                    </a:p>
+                  </a:txBody>
+                  <a:tcPr marL="91440" marR="91440" marT="36576" marB="36576">
+                    <a:solidFill>
+                      <a:srgbClr val="2B4A7D"/>
+                    </a:solidFill>
+                  </a:tcPr>
+                </a:tc>
+                <a:tc>
+                  <a:txBody>
+                    <a:bodyPr/>
+                    <a:lstStyle/>
+                    <a:p>
+                      <a:r>
+                        <a:rPr sz="1300" b="1">
+                          <a:solidFill>
+                            <a:srgbClr val="FFFFFF"/>
+                          </a:solidFill>
+                          <a:latin typeface="Calibri"/>
+                        </a:rPr>
+                        <a:t>What it is for</a:t>
+                      </a:r>
+                    </a:p>
+                  </a:txBody>
+                  <a:tcPr marL="91440" marR="91440" marT="36576" marB="36576">
+                    <a:solidFill>
+                      <a:srgbClr val="2B4A7D"/>
+                    </a:solidFill>
+                  </a:tcPr>
+                </a:tc>
+              </a:tr>
+              <a:tr h="667512">
+                <a:tc>
+                  <a:txBody>
+                    <a:bodyPr/>
+                    <a:lstStyle/>
+                    <a:p>
+                      <a:r>
+                        <a:rPr sz="1300" b="0">
+                          <a:solidFill>
+                            <a:srgbClr val="1C1C1A"/>
+                          </a:solidFill>
+                          <a:latin typeface="Calibri"/>
+                        </a:rPr>
+                        <a:t>Neo</a:t>
+                      </a:r>
+                    </a:p>
+                  </a:txBody>
+                  <a:tcPr marL="91440" marR="91440" marT="36576" marB="36576">
+                    <a:solidFill>
+                      <a:srgbClr val="F7F7F5"/>
+                    </a:solidFill>
+                  </a:tcPr>
+                </a:tc>
+                <a:tc>
+                  <a:txBody>
+                    <a:bodyPr/>
+                    <a:lstStyle/>
+                    <a:p>
+                      <a:r>
+                        <a:rPr sz="1300" b="0">
+                          <a:solidFill>
+                            <a:srgbClr val="1C1C1A"/>
+                          </a:solidFill>
+                          <a:latin typeface="Calibri"/>
+                        </a:rPr>
+                        <a:t>Neo carries all the tests and the exams, and the daily platform check runs there.</a:t>
+                      </a:r>
+                    </a:p>
+                  </a:txBody>
+                  <a:tcPr marL="91440" marR="91440" marT="36576" marB="36576">
+                    <a:solidFill>
+                      <a:srgbClr val="F7F7F5"/>
+                    </a:solidFill>
+                  </a:tcPr>
+                </a:tc>
+              </a:tr>
+              <a:tr h="667512">
+                <a:tc>
+                  <a:txBody>
+                    <a:bodyPr/>
+                    <a:lstStyle/>
+                    <a:p>
+                      <a:r>
+                        <a:rPr sz="1300" b="0">
+                          <a:solidFill>
+                            <a:srgbClr val="1C1C1A"/>
+                          </a:solidFill>
+                          <a:latin typeface="Calibri"/>
+                        </a:rPr>
+                        <a:t>CodeChef</a:t>
+                      </a:r>
+                    </a:p>
+                  </a:txBody>
+                  <a:tcPr marL="91440" marR="91440" marT="36576" marB="36576">
+                    <a:solidFill>
+                      <a:srgbClr val="F7F7F5"/>
+                    </a:solidFill>
+                  </a:tcPr>
+                </a:tc>
+                <a:tc>
+                  <a:txBody>
+                    <a:bodyPr/>
+                    <a:lstStyle/>
+                    <a:p>
+                      <a:r>
+                        <a:rPr sz="1300" b="0">
+                          <a:solidFill>
+                            <a:srgbClr val="1C1C1A"/>
+                          </a:solidFill>
+                          <a:latin typeface="Calibri"/>
+                        </a:rPr>
+                        <a:t>CodeChef carries the daily competitive coding practice, which carries no assessment.</a:t>
+                      </a:r>
+                    </a:p>
+                  </a:txBody>
+                  <a:tcPr marL="91440" marR="91440" marT="36576" marB="36576">
+                    <a:solidFill>
+                      <a:srgbClr val="F7F7F5"/>
+                    </a:solidFill>
+                  </a:tcPr>
+                </a:tc>
+              </a:tr>
+              <a:tr h="667512">
+                <a:tc>
+                  <a:txBody>
+                    <a:bodyPr/>
+                    <a:lstStyle/>
+                    <a:p>
+                      <a:r>
+                        <a:rPr sz="1300" b="0">
+                          <a:solidFill>
+                            <a:srgbClr val="1C1C1A"/>
+                          </a:solidFill>
+                          <a:latin typeface="Calibri"/>
+                        </a:rPr>
+                        <a:t>GitHub</a:t>
+                      </a:r>
+                    </a:p>
+                  </a:txBody>
+                  <a:tcPr marL="91440" marR="91440" marT="36576" marB="36576">
+                    <a:solidFill>
+                      <a:srgbClr val="F7F7F5"/>
+                    </a:solidFill>
+                  </a:tcPr>
+                </a:tc>
+                <a:tc>
+                  <a:txBody>
+                    <a:bodyPr/>
+                    <a:lstStyle/>
+                    <a:p>
+                      <a:r>
+                        <a:rPr sz="1300" b="0">
+                          <a:solidFill>
+                            <a:srgbClr val="1C1C1A"/>
+                          </a:solidFill>
+                          <a:latin typeface="Calibri"/>
+                        </a:rPr>
+                        <a:t>GitHub carries your exercises, your projects and your portfolio.</a:t>
+                      </a:r>
+                    </a:p>
+                  </a:txBody>
+                  <a:tcPr marL="91440" marR="91440" marT="36576" marB="36576">
+                    <a:solidFill>
+                      <a:srgbClr val="F7F7F5"/>
+                    </a:solidFill>
+                  </a:tcPr>
+                </a:tc>
+              </a:tr>
+              <a:tr h="667512">
+                <a:tc>
+                  <a:txBody>
+                    <a:bodyPr/>
+                    <a:lstStyle/>
+                    <a:p>
+                      <a:r>
+                        <a:rPr sz="1300" b="0">
+                          <a:solidFill>
+                            <a:srgbClr val="1C1C1A"/>
+                          </a:solidFill>
+                          <a:latin typeface="Calibri"/>
+                        </a:rPr>
+                        <a:t>LMS</a:t>
+                      </a:r>
+                    </a:p>
+                  </a:txBody>
+                  <a:tcPr marL="91440" marR="91440" marT="36576" marB="36576">
+                    <a:solidFill>
+                      <a:srgbClr val="F7F7F5"/>
+                    </a:solidFill>
+                  </a:tcPr>
+                </a:tc>
+                <a:tc>
+                  <a:txBody>
+                    <a:bodyPr/>
+                    <a:lstStyle/>
+                    <a:p>
+                      <a:r>
+                        <a:rPr sz="1300" b="0">
+                          <a:solidFill>
+                            <a:srgbClr val="1C1C1A"/>
+                          </a:solidFill>
+                          <a:latin typeface="Calibri"/>
+                        </a:rPr>
+                        <a:t>The LMS carries the content and your submissions.</a:t>
+                      </a:r>
+                    </a:p>
+                  </a:txBody>
+                  <a:tcPr marL="91440" marR="91440" marT="36576" marB="36576">
+                    <a:solidFill>
+                      <a:srgbClr val="F7F7F5"/>
+                    </a:solidFill>
+                  </a:tcPr>
+                </a:tc>
+              </a:tr>
+            </a:tbl>
+          </a:graphicData>
+        </a:graphic>
+      </p:graphicFrame>
+      <p:sp>
+        <p:nvSpPr>
+          <p:cNvPr id="5" name="TextBox 4"/>
           <p:cNvSpPr txBox="1"/>
           <p:nvPr/>
         </p:nvSpPr>
         <p:spPr>
           <a:xfrm>
-            <a:off x="777240" y="1965960"/>
-            <a:ext cx="10607040" cy="4206240"/>
+            <a:off x="777240" y="5715000"/>
+            <a:ext cx="10607040" cy="457200"/>
           </a:xfrm>
           <a:prstGeom prst="rect">
             <a:avLst/>
@@ -6619,93 +7213,8 @@
           </a:bodyPr>
           <a:lstStyle/>
           <a:p>
-            <a:pPr algn="l"/>
-            <a:r>
-              <a:rPr b="0" sz="2100">
-                <a:solidFill>
-                  <a:srgbClr val="1C1C1A"/>
-                </a:solidFill>
-                <a:latin typeface="Calibri"/>
-              </a:rPr>
-              <a:t>| Platform | What it is for |</a:t>
-            </a:r>
-          </a:p>
-          <a:p>
-            <a:pPr algn="l"/>
-            <a:r>
-              <a:rPr b="0" sz="2100">
-                <a:solidFill>
-                  <a:srgbClr val="1C1C1A"/>
-                </a:solidFill>
-                <a:latin typeface="Calibri"/>
-              </a:rPr>
-              <a:t>|---|---|</a:t>
-            </a:r>
-          </a:p>
-          <a:p>
-            <a:pPr algn="l"/>
-            <a:r>
-              <a:rPr b="0" sz="2100">
-                <a:solidFill>
-                  <a:srgbClr val="1C1C1A"/>
-                </a:solidFill>
-                <a:latin typeface="Calibri"/>
-              </a:rPr>
-              <a:t>| Neo | Neo carries all the tests and the exams, and the daily platform check runs there. |</a:t>
-            </a:r>
-          </a:p>
-          <a:p>
-            <a:pPr algn="l"/>
-            <a:r>
-              <a:rPr b="0" sz="2100">
-                <a:solidFill>
-                  <a:srgbClr val="1C1C1A"/>
-                </a:solidFill>
-                <a:latin typeface="Calibri"/>
-              </a:rPr>
-              <a:t>| CodeChef | CodeChef carries the daily competitive coding practice, which carries no assessment. |</a:t>
-            </a:r>
-          </a:p>
-          <a:p>
-            <a:pPr algn="l"/>
-            <a:r>
-              <a:rPr b="0" sz="2100">
-                <a:solidFill>
-                  <a:srgbClr val="1C1C1A"/>
-                </a:solidFill>
-                <a:latin typeface="Calibri"/>
-              </a:rPr>
-              <a:t>| GitHub | GitHub carries your exercises, your projects and your portfolio. |</a:t>
-            </a:r>
-          </a:p>
-          <a:p>
-            <a:pPr algn="l"/>
-            <a:r>
-              <a:rPr b="0" sz="2100">
-                <a:solidFill>
-                  <a:srgbClr val="1C1C1A"/>
-                </a:solidFill>
-                <a:latin typeface="Calibri"/>
-              </a:rPr>
-              <a:t>| LMS | The LMS carries the content and your submissions. |</a:t>
-            </a:r>
-          </a:p>
-          <a:p>
-            <a:pPr algn="l"/>
-            <a:r>
-              <a:rPr b="0" sz="2100">
-                <a:solidFill>
-                  <a:srgbClr val="1C1C1A"/>
-                </a:solidFill>
-                <a:latin typeface="Calibri"/>
-              </a:rPr>
-              <a:t> </a:t>
-            </a:r>
-          </a:p>
-          <a:p>
-            <a:pPr algn="l"/>
-            <a:r>
-              <a:rPr b="0" sz="2100">
+            <a:r>
+              <a:rPr sz="1500" b="0">
                 <a:solidFill>
                   <a:srgbClr val="1C1C1A"/>
                 </a:solidFill>
@@ -6718,7 +7227,7 @@
       </p:sp>
       <p:sp>
         <p:nvSpPr>
-          <p:cNvPr id="5" name="TextBox 4"/>
+          <p:cNvPr id="6" name="TextBox 5"/>
           <p:cNvSpPr txBox="1"/>
           <p:nvPr/>
         </p:nvSpPr>

--- a/content/W01/D1/C2_W01_D01_deck_00_intro_STUDENT.pptx
+++ b/content/W01/D1/C2_W01_D01_deck_00_intro_STUDENT.pptx
@@ -6800,7 +6800,7 @@
                 </a:solidFill>
                 <a:latin typeface="Calibri"/>
               </a:rPr>
-              <a:t>The industry expert attends on Friday and Saturday. No tests run in a build week.</a:t>
+              <a:t>The industry expert attends on Friday and Saturday. A build week runs no weekly recap paper, and a major exam can still fall inside a build week.</a:t>
             </a:r>
           </a:p>
         </p:txBody>

--- a/content/W01/D1/C2_W01_D01_deck_00_intro_STUDENT.pptx
+++ b/content/W01/D1/C2_W01_D01_deck_00_intro_STUDENT.pptx
@@ -3201,7 +3201,7 @@
         <p:spPr>
           <a:xfrm>
             <a:off x="777240" y="1965960"/>
-            <a:ext cx="10607040" cy="4206240"/>
+            <a:ext cx="10607040" cy="1533525"/>
           </a:xfrm>
           <a:prstGeom prst="rect">
             <a:avLst/>
@@ -3214,9 +3214,13 @@
           </a:bodyPr>
           <a:lstStyle/>
           <a:p>
-            <a:pPr algn="l"/>
-            <a:r>
-              <a:rPr b="0" sz="2100">
+            <a:pPr>
+              <a:spcAft>
+                <a:spcPts val="1000"/>
+              </a:spcAft>
+            </a:pPr>
+            <a:r>
+              <a:rPr sz="2100" b="0">
                 <a:solidFill>
                   <a:srgbClr val="1C1C1A"/>
                 </a:solidFill>
@@ -3226,45 +3230,29 @@
             </a:r>
           </a:p>
           <a:p>
-            <a:pPr algn="l"/>
-            <a:r>
-              <a:rPr b="0" sz="2100">
+            <a:pPr>
+              <a:spcAft>
+                <a:spcPts val="1000"/>
+              </a:spcAft>
+            </a:pPr>
+            <a:r>
+              <a:rPr sz="2100" b="0">
                 <a:solidFill>
                   <a:srgbClr val="1C1C1A"/>
                 </a:solidFill>
                 <a:latin typeface="Calibri"/>
               </a:rPr>
-              <a:t> </a:t>
-            </a:r>
-          </a:p>
-          <a:p>
-            <a:pPr algn="l"/>
-            <a:r>
-              <a:rPr b="0" sz="2100">
-                <a:solidFill>
-                  <a:srgbClr val="1C1C1A"/>
-                </a:solidFill>
-                <a:latin typeface="Calibri"/>
-              </a:rPr>
               <a:t>It came back with 13 delivered orders, Rs 25,720.</a:t>
             </a:r>
           </a:p>
           <a:p>
-            <a:pPr algn="l"/>
-            <a:r>
-              <a:rPr b="0" sz="2100">
-                <a:solidFill>
-                  <a:srgbClr val="1C1C1A"/>
-                </a:solidFill>
-                <a:latin typeface="Calibri"/>
-              </a:rPr>
-              <a:t> </a:t>
-            </a:r>
-          </a:p>
-          <a:p>
-            <a:pPr algn="l"/>
-            <a:r>
-              <a:rPr b="0" sz="2100">
+            <a:pPr>
+              <a:spcAft>
+                <a:spcPts val="1000"/>
+              </a:spcAft>
+            </a:pPr>
+            <a:r>
+              <a:rPr sz="2100" b="0">
                 <a:solidFill>
                   <a:srgbClr val="1C1C1A"/>
                 </a:solidFill>
@@ -3283,7 +3271,7 @@
         </p:nvSpPr>
         <p:spPr>
           <a:xfrm>
-            <a:off x="777240" y="6263640"/>
+            <a:off x="777240" y="6309360"/>
             <a:ext cx="10607040" cy="365760"/>
           </a:xfrm>
           <a:prstGeom prst="rect">
@@ -3292,13 +3280,13 @@
           <a:noFill/>
         </p:spPr>
         <p:txBody>
-          <a:bodyPr wrap="square">
+          <a:bodyPr wrap="none">
             <a:spAutoFit/>
           </a:bodyPr>
           <a:lstStyle/>
           <a:p>
             <a:r>
-              <a:rPr sz="1000" b="0">
+              <a:rPr sz="1000">
                 <a:solidFill>
                   <a:srgbClr val="5F6360"/>
                 </a:solidFill>
@@ -3414,7 +3402,7 @@
         <p:spPr>
           <a:xfrm>
             <a:off x="777240" y="1965960"/>
-            <a:ext cx="10607040" cy="4206240"/>
+            <a:ext cx="10607040" cy="2152650"/>
           </a:xfrm>
           <a:prstGeom prst="rect">
             <a:avLst/>
@@ -3427,9 +3415,13 @@
           </a:bodyPr>
           <a:lstStyle/>
           <a:p>
-            <a:pPr algn="l"/>
-            <a:r>
-              <a:rPr b="0" sz="2100">
+            <a:pPr>
+              <a:spcAft>
+                <a:spcPts val="1000"/>
+              </a:spcAft>
+            </a:pPr>
+            <a:r>
+              <a:rPr sz="2100" b="0">
                 <a:solidFill>
                   <a:srgbClr val="1C1C1A"/>
                 </a:solidFill>
@@ -3439,69 +3431,45 @@
             </a:r>
           </a:p>
           <a:p>
-            <a:pPr algn="l"/>
-            <a:r>
-              <a:rPr b="0" sz="2100">
+            <a:pPr>
+              <a:spcAft>
+                <a:spcPts val="1000"/>
+              </a:spcAft>
+            </a:pPr>
+            <a:r>
+              <a:rPr sz="2100" b="0">
                 <a:solidFill>
                   <a:srgbClr val="1C1C1A"/>
                 </a:solidFill>
                 <a:latin typeface="Calibri"/>
               </a:rPr>
-              <a:t> </a:t>
-            </a:r>
-          </a:p>
-          <a:p>
-            <a:pPr algn="l"/>
-            <a:r>
-              <a:rPr b="0" sz="2100">
+              <a:t>The same records become a table in Postgres in Week 2, and a DataFrame in pandas in the same week.</a:t>
+            </a:r>
+          </a:p>
+          <a:p>
+            <a:pPr>
+              <a:spcAft>
+                <a:spcPts val="1000"/>
+              </a:spcAft>
+            </a:pPr>
+            <a:r>
+              <a:rPr sz="2100" b="0">
                 <a:solidFill>
                   <a:srgbClr val="1C1C1A"/>
                 </a:solidFill>
                 <a:latin typeface="Calibri"/>
               </a:rPr>
-              <a:t>The same records become a table in Postgres in Week 2, and a DataFrame in pandas in the same week.</a:t>
-            </a:r>
-          </a:p>
-          <a:p>
-            <a:pPr algn="l"/>
-            <a:r>
-              <a:rPr b="0" sz="2100">
-                <a:solidFill>
-                  <a:srgbClr val="1C1C1A"/>
-                </a:solidFill>
-                <a:latin typeface="Calibri"/>
-              </a:rPr>
-              <a:t> </a:t>
-            </a:r>
-          </a:p>
-          <a:p>
-            <a:pPr algn="l"/>
-            <a:r>
-              <a:rPr b="0" sz="2100">
-                <a:solidFill>
-                  <a:srgbClr val="1C1C1A"/>
-                </a:solidFill>
-                <a:latin typeface="Calibri"/>
-              </a:rPr>
               <a:t>They become a feature table when the modelling weeks arrive, and a document corpus when retrieval arrives in Weeks 11 and 12.</a:t>
             </a:r>
           </a:p>
           <a:p>
-            <a:pPr algn="l"/>
-            <a:r>
-              <a:rPr b="0" sz="2100">
-                <a:solidFill>
-                  <a:srgbClr val="1C1C1A"/>
-                </a:solidFill>
-                <a:latin typeface="Calibri"/>
-              </a:rPr>
-              <a:t> </a:t>
-            </a:r>
-          </a:p>
-          <a:p>
-            <a:pPr algn="l"/>
-            <a:r>
-              <a:rPr b="0" sz="2100">
+            <a:pPr>
+              <a:spcAft>
+                <a:spcPts val="1000"/>
+              </a:spcAft>
+            </a:pPr>
+            <a:r>
+              <a:rPr sz="2100" b="0">
                 <a:solidFill>
                   <a:srgbClr val="1C1C1A"/>
                 </a:solidFill>
@@ -3520,7 +3488,7 @@
         </p:nvSpPr>
         <p:spPr>
           <a:xfrm>
-            <a:off x="777240" y="6263640"/>
+            <a:off x="777240" y="6309360"/>
             <a:ext cx="10607040" cy="365760"/>
           </a:xfrm>
           <a:prstGeom prst="rect">
@@ -3529,13 +3497,13 @@
           <a:noFill/>
         </p:spPr>
         <p:txBody>
-          <a:bodyPr wrap="square">
+          <a:bodyPr wrap="none">
             <a:spAutoFit/>
           </a:bodyPr>
           <a:lstStyle/>
           <a:p>
             <a:r>
-              <a:rPr sz="1000" b="0">
+              <a:rPr sz="1000">
                 <a:solidFill>
                   <a:srgbClr val="5F6360"/>
                 </a:solidFill>
@@ -3651,7 +3619,7 @@
         <p:spPr>
           <a:xfrm>
             <a:off x="777240" y="1965960"/>
-            <a:ext cx="10607040" cy="4206240"/>
+            <a:ext cx="10607040" cy="2028825"/>
           </a:xfrm>
           <a:prstGeom prst="rect">
             <a:avLst/>
@@ -3664,9 +3632,13 @@
           </a:bodyPr>
           <a:lstStyle/>
           <a:p>
-            <a:pPr algn="l"/>
-            <a:r>
-              <a:rPr b="0" sz="2100">
+            <a:pPr>
+              <a:spcAft>
+                <a:spcPts val="1000"/>
+              </a:spcAft>
+            </a:pPr>
+            <a:r>
+              <a:rPr sz="2100" b="0">
                 <a:solidFill>
                   <a:srgbClr val="1C1C1A"/>
                 </a:solidFill>
@@ -3676,45 +3648,29 @@
             </a:r>
           </a:p>
           <a:p>
-            <a:pPr algn="l"/>
-            <a:r>
-              <a:rPr b="0" sz="2100">
+            <a:pPr>
+              <a:spcAft>
+                <a:spcPts val="1000"/>
+              </a:spcAft>
+            </a:pPr>
+            <a:r>
+              <a:rPr sz="2100" b="0">
                 <a:solidFill>
                   <a:srgbClr val="1C1C1A"/>
                 </a:solidFill>
                 <a:latin typeface="Calibri"/>
               </a:rPr>
-              <a:t> </a:t>
-            </a:r>
-          </a:p>
-          <a:p>
-            <a:pPr algn="l"/>
-            <a:r>
-              <a:rPr b="0" sz="2100">
-                <a:solidFill>
-                  <a:srgbClr val="1C1C1A"/>
-                </a:solidFill>
-                <a:latin typeface="Calibri"/>
-              </a:rPr>
               <a:t>In 3 minutes, draw Kalpa from memory: five boxes for the five units, then the six tables of Kalpa Retail with the lines that join them.</a:t>
             </a:r>
           </a:p>
           <a:p>
-            <a:pPr algn="l"/>
-            <a:r>
-              <a:rPr b="0" sz="2100">
-                <a:solidFill>
-                  <a:srgbClr val="1C1C1A"/>
-                </a:solidFill>
-                <a:latin typeface="Calibri"/>
-              </a:rPr>
-              <a:t> </a:t>
-            </a:r>
-          </a:p>
-          <a:p>
-            <a:pPr algn="l"/>
-            <a:r>
-              <a:rPr b="0" sz="2100">
+            <a:pPr>
+              <a:spcAft>
+                <a:spcPts val="1000"/>
+              </a:spcAft>
+            </a:pPr>
+            <a:r>
+              <a:rPr sz="2100" b="0">
                 <a:solidFill>
                   <a:srgbClr val="1C1C1A"/>
                 </a:solidFill>
@@ -3733,7 +3689,7 @@
         </p:nvSpPr>
         <p:spPr>
           <a:xfrm>
-            <a:off x="777240" y="6263640"/>
+            <a:off x="777240" y="6309360"/>
             <a:ext cx="10607040" cy="365760"/>
           </a:xfrm>
           <a:prstGeom prst="rect">
@@ -3742,13 +3698,13 @@
           <a:noFill/>
         </p:spPr>
         <p:txBody>
-          <a:bodyPr wrap="square">
+          <a:bodyPr wrap="none">
             <a:spAutoFit/>
           </a:bodyPr>
           <a:lstStyle/>
           <a:p>
             <a:r>
-              <a:rPr sz="1000" b="0">
+              <a:rPr sz="1000">
                 <a:solidFill>
                   <a:srgbClr val="5F6360"/>
                 </a:solidFill>
@@ -3864,7 +3820,7 @@
         <p:spPr>
           <a:xfrm>
             <a:off x="777240" y="1965960"/>
-            <a:ext cx="10607040" cy="4206240"/>
+            <a:ext cx="10607040" cy="1409700"/>
           </a:xfrm>
           <a:prstGeom prst="rect">
             <a:avLst/>
@@ -3877,9 +3833,13 @@
           </a:bodyPr>
           <a:lstStyle/>
           <a:p>
-            <a:pPr algn="l"/>
-            <a:r>
-              <a:rPr b="0" sz="2100">
+            <a:pPr>
+              <a:spcAft>
+                <a:spcPts val="1000"/>
+              </a:spcAft>
+            </a:pPr>
+            <a:r>
+              <a:rPr sz="2100" b="0">
                 <a:solidFill>
                   <a:srgbClr val="1C1C1A"/>
                 </a:solidFill>
@@ -3889,21 +3849,13 @@
             </a:r>
           </a:p>
           <a:p>
-            <a:pPr algn="l"/>
-            <a:r>
-              <a:rPr b="0" sz="2100">
-                <a:solidFill>
-                  <a:srgbClr val="1C1C1A"/>
-                </a:solidFill>
-                <a:latin typeface="Calibri"/>
-              </a:rPr>
-              <a:t> </a:t>
-            </a:r>
-          </a:p>
-          <a:p>
-            <a:pPr algn="l"/>
-            <a:r>
-              <a:rPr b="0" sz="2100">
+            <a:pPr>
+              <a:spcAft>
+                <a:spcPts val="1000"/>
+              </a:spcAft>
+            </a:pPr>
+            <a:r>
+              <a:rPr sz="2100" b="0">
                 <a:solidFill>
                   <a:srgbClr val="1C1C1A"/>
                 </a:solidFill>
@@ -3922,7 +3874,7 @@
         </p:nvSpPr>
         <p:spPr>
           <a:xfrm>
-            <a:off x="777240" y="6263640"/>
+            <a:off x="777240" y="6309360"/>
             <a:ext cx="10607040" cy="365760"/>
           </a:xfrm>
           <a:prstGeom prst="rect">
@@ -3931,13 +3883,13 @@
           <a:noFill/>
         </p:spPr>
         <p:txBody>
-          <a:bodyPr wrap="square">
+          <a:bodyPr wrap="none">
             <a:spAutoFit/>
           </a:bodyPr>
           <a:lstStyle/>
           <a:p>
             <a:r>
-              <a:rPr sz="1000" b="0">
+              <a:rPr sz="1000">
                 <a:solidFill>
                   <a:srgbClr val="5F6360"/>
                 </a:solidFill>
@@ -4032,6 +3984,7 @@
           </a:bodyPr>
           <a:lstStyle/>
           <a:p>
+            <a:pPr algn="ctr"/>
             <a:r>
               <a:rPr sz="3600" b="1">
                 <a:solidFill>
@@ -4053,7 +4006,7 @@
         <p:spPr>
           <a:xfrm>
             <a:off x="777240" y="1965960"/>
-            <a:ext cx="10607040" cy="4206240"/>
+            <a:ext cx="10607040" cy="542925"/>
           </a:xfrm>
           <a:prstGeom prst="rect">
             <a:avLst/>
@@ -4066,31 +4019,35 @@
           </a:bodyPr>
           <a:lstStyle/>
           <a:p>
-            <a:pPr algn="l"/>
-            <a:r>
-              <a:rPr b="0" sz="1800">
+            <a:pPr algn="ctr">
+              <a:spcAft>
+                <a:spcPts val="1000"/>
+              </a:spcAft>
+            </a:pPr>
+            <a:r>
+              <a:rPr sz="2100" b="0">
                 <a:solidFill>
                   <a:srgbClr val="FFFFFF"/>
                 </a:solidFill>
-                <a:latin typeface="Consolas"/>
+                <a:latin typeface="Calibri"/>
               </a:rPr>
               <a:t>[the company] &gt; </a:t>
             </a:r>
             <a:r>
-              <a:rPr b="1" sz="1800">
+              <a:rPr sz="2100" b="1">
                 <a:solidFill>
                   <a:srgbClr val="FFFFFF"/>
                 </a:solidFill>
-                <a:latin typeface="Consolas"/>
+                <a:latin typeface="Calibri"/>
               </a:rPr>
               <a:t>[the journey]</a:t>
             </a:r>
             <a:r>
-              <a:rPr b="0" sz="1800">
+              <a:rPr sz="2100" b="0">
                 <a:solidFill>
                   <a:srgbClr val="FFFFFF"/>
                 </a:solidFill>
-                <a:latin typeface="Consolas"/>
+                <a:latin typeface="Calibri"/>
               </a:rPr>
               <a:t> &gt; [the room]</a:t>
             </a:r>
@@ -4105,7 +4062,7 @@
         </p:nvSpPr>
         <p:spPr>
           <a:xfrm>
-            <a:off x="777240" y="6263640"/>
+            <a:off x="777240" y="6309360"/>
             <a:ext cx="10607040" cy="365760"/>
           </a:xfrm>
           <a:prstGeom prst="rect">
@@ -4114,13 +4071,13 @@
           <a:noFill/>
         </p:spPr>
         <p:txBody>
-          <a:bodyPr wrap="square">
+          <a:bodyPr wrap="none">
             <a:spAutoFit/>
           </a:bodyPr>
           <a:lstStyle/>
           <a:p>
             <a:r>
-              <a:rPr sz="1000" b="0">
+              <a:rPr sz="1000">
                 <a:solidFill>
                   <a:srgbClr val="5F6360"/>
                 </a:solidFill>
@@ -4235,8 +4192,8 @@
         </p:nvSpPr>
         <p:spPr>
           <a:xfrm>
-            <a:off x="777240" y="1691640"/>
-            <a:ext cx="10607040" cy="502920"/>
+            <a:off x="777240" y="1965960"/>
+            <a:ext cx="10607040" cy="542925"/>
           </a:xfrm>
           <a:prstGeom prst="rect">
             <a:avLst/>
@@ -4249,8 +4206,13 @@
           </a:bodyPr>
           <a:lstStyle/>
           <a:p>
-            <a:r>
-              <a:rPr sz="1700" b="0">
+            <a:pPr>
+              <a:spcAft>
+                <a:spcPts val="1000"/>
+              </a:spcAft>
+            </a:pPr>
+            <a:r>
+              <a:rPr sz="2100" b="0">
                 <a:solidFill>
                   <a:srgbClr val="1C1C1A"/>
                 </a:solidFill>
@@ -4270,8 +4232,8 @@
           <p:nvPr/>
         </p:nvGraphicFramePr>
         <p:xfrm>
-          <a:off x="777240" y="2286000"/>
-          <a:ext cx="10607040" cy="3520440"/>
+          <a:off x="777240" y="2646045"/>
+          <a:ext cx="10607040" cy="2304288"/>
         </p:xfrm>
         <a:graphic>
           <a:graphicData uri="http://schemas.openxmlformats.org/drawingml/2006/table">
@@ -4280,11 +4242,11 @@
                 <a:tableStyleId>{5C22544A-7EE6-4342-B048-85BDC9FD1C3A}</a:tableStyleId>
               </a:tblPr>
               <a:tblGrid>
-                <a:gridCol w="2377440"/>
-                <a:gridCol w="4114800"/>
-                <a:gridCol w="4114800"/>
+                <a:gridCol w="3535680"/>
+                <a:gridCol w="3535680"/>
+                <a:gridCol w="3535680"/>
               </a:tblGrid>
-              <a:tr h="586740">
+              <a:tr h="384048">
                 <a:tc>
                   <a:txBody>
                     <a:bodyPr/>
@@ -4293,7 +4255,7 @@
                       <a:r>
                         <a:rPr sz="1300" b="1">
                           <a:solidFill>
-                            <a:srgbClr val="FFFFFF"/>
+                            <a:srgbClr val="2B4A7D"/>
                           </a:solidFill>
                           <a:latin typeface="Calibri"/>
                         </a:rPr>
@@ -4301,11 +4263,7 @@
                       </a:r>
                     </a:p>
                   </a:txBody>
-                  <a:tcPr marL="91440" marR="91440" marT="36576" marB="36576">
-                    <a:solidFill>
-                      <a:srgbClr val="2B4A7D"/>
-                    </a:solidFill>
-                  </a:tcPr>
+                  <a:tcPr marT="25400" marB="25400"/>
                 </a:tc>
                 <a:tc>
                   <a:txBody>
@@ -4315,7 +4273,7 @@
                       <a:r>
                         <a:rPr sz="1300" b="1">
                           <a:solidFill>
-                            <a:srgbClr val="FFFFFF"/>
+                            <a:srgbClr val="2B4A7D"/>
                           </a:solidFill>
                           <a:latin typeface="Calibri"/>
                         </a:rPr>
@@ -4323,11 +4281,7 @@
                       </a:r>
                     </a:p>
                   </a:txBody>
-                  <a:tcPr marL="91440" marR="91440" marT="36576" marB="36576">
-                    <a:solidFill>
-                      <a:srgbClr val="2B4A7D"/>
-                    </a:solidFill>
-                  </a:tcPr>
+                  <a:tcPr marT="25400" marB="25400"/>
                 </a:tc>
                 <a:tc>
                   <a:txBody>
@@ -4337,7 +4291,7 @@
                       <a:r>
                         <a:rPr sz="1300" b="1">
                           <a:solidFill>
-                            <a:srgbClr val="FFFFFF"/>
+                            <a:srgbClr val="2B4A7D"/>
                           </a:solidFill>
                           <a:latin typeface="Calibri"/>
                         </a:rPr>
@@ -4345,21 +4299,17 @@
                       </a:r>
                     </a:p>
                   </a:txBody>
-                  <a:tcPr marL="91440" marR="91440" marT="36576" marB="36576">
-                    <a:solidFill>
-                      <a:srgbClr val="2B4A7D"/>
-                    </a:solidFill>
-                  </a:tcPr>
+                  <a:tcPr marT="25400" marB="25400"/>
                 </a:tc>
               </a:tr>
-              <a:tr h="586740">
+              <a:tr h="384048">
                 <a:tc>
                   <a:txBody>
                     <a:bodyPr/>
                     <a:lstStyle/>
                     <a:p>
                       <a:r>
-                        <a:rPr sz="1300" b="0">
+                        <a:rPr sz="1400" b="0">
                           <a:solidFill>
                             <a:srgbClr val="1C1C1A"/>
                           </a:solidFill>
@@ -4369,11 +4319,7 @@
                       </a:r>
                     </a:p>
                   </a:txBody>
-                  <a:tcPr marL="91440" marR="91440" marT="36576" marB="36576">
-                    <a:solidFill>
-                      <a:srgbClr val="F7F7F5"/>
-                    </a:solidFill>
-                  </a:tcPr>
+                  <a:tcPr marT="25400" marB="25400"/>
                 </a:tc>
                 <a:tc>
                   <a:txBody>
@@ -4381,7 +4327,7 @@
                     <a:lstStyle/>
                     <a:p>
                       <a:r>
-                        <a:rPr sz="1300" b="0">
+                        <a:rPr sz="1400" b="0">
                           <a:solidFill>
                             <a:srgbClr val="1C1C1A"/>
                           </a:solidFill>
@@ -4391,11 +4337,7 @@
                       </a:r>
                     </a:p>
                   </a:txBody>
-                  <a:tcPr marL="91440" marR="91440" marT="36576" marB="36576">
-                    <a:solidFill>
-                      <a:srgbClr val="F7F7F5"/>
-                    </a:solidFill>
-                  </a:tcPr>
+                  <a:tcPr marT="25400" marB="25400"/>
                 </a:tc>
                 <a:tc>
                   <a:txBody>
@@ -4403,7 +4345,7 @@
                     <a:lstStyle/>
                     <a:p>
                       <a:r>
-                        <a:rPr sz="1300" b="0">
+                        <a:rPr sz="1400" b="0">
                           <a:solidFill>
                             <a:srgbClr val="1C1C1A"/>
                           </a:solidFill>
@@ -4413,21 +4355,17 @@
                       </a:r>
                     </a:p>
                   </a:txBody>
-                  <a:tcPr marL="91440" marR="91440" marT="36576" marB="36576">
-                    <a:solidFill>
-                      <a:srgbClr val="F7F7F5"/>
-                    </a:solidFill>
-                  </a:tcPr>
+                  <a:tcPr marT="25400" marB="25400"/>
                 </a:tc>
               </a:tr>
-              <a:tr h="586740">
+              <a:tr h="384048">
                 <a:tc>
                   <a:txBody>
                     <a:bodyPr/>
                     <a:lstStyle/>
                     <a:p>
                       <a:r>
-                        <a:rPr sz="1300" b="0">
+                        <a:rPr sz="1400" b="0">
                           <a:solidFill>
                             <a:srgbClr val="1C1C1A"/>
                           </a:solidFill>
@@ -4437,11 +4375,7 @@
                       </a:r>
                     </a:p>
                   </a:txBody>
-                  <a:tcPr marL="91440" marR="91440" marT="36576" marB="36576">
-                    <a:solidFill>
-                      <a:srgbClr val="F7F7F5"/>
-                    </a:solidFill>
-                  </a:tcPr>
+                  <a:tcPr marT="25400" marB="25400"/>
                 </a:tc>
                 <a:tc>
                   <a:txBody>
@@ -4449,7 +4383,7 @@
                     <a:lstStyle/>
                     <a:p>
                       <a:r>
-                        <a:rPr sz="1300" b="0">
+                        <a:rPr sz="1400" b="0">
                           <a:solidFill>
                             <a:srgbClr val="1C1C1A"/>
                           </a:solidFill>
@@ -4459,11 +4393,7 @@
                       </a:r>
                     </a:p>
                   </a:txBody>
-                  <a:tcPr marL="91440" marR="91440" marT="36576" marB="36576">
-                    <a:solidFill>
-                      <a:srgbClr val="F7F7F5"/>
-                    </a:solidFill>
-                  </a:tcPr>
+                  <a:tcPr marT="25400" marB="25400"/>
                 </a:tc>
                 <a:tc>
                   <a:txBody>
@@ -4471,7 +4401,7 @@
                     <a:lstStyle/>
                     <a:p>
                       <a:r>
-                        <a:rPr sz="1300" b="0">
+                        <a:rPr sz="1400" b="0">
                           <a:solidFill>
                             <a:srgbClr val="1C1C1A"/>
                           </a:solidFill>
@@ -4481,21 +4411,17 @@
                       </a:r>
                     </a:p>
                   </a:txBody>
-                  <a:tcPr marL="91440" marR="91440" marT="36576" marB="36576">
-                    <a:solidFill>
-                      <a:srgbClr val="F7F7F5"/>
-                    </a:solidFill>
-                  </a:tcPr>
+                  <a:tcPr marT="25400" marB="25400"/>
                 </a:tc>
               </a:tr>
-              <a:tr h="586740">
+              <a:tr h="384048">
                 <a:tc>
                   <a:txBody>
                     <a:bodyPr/>
                     <a:lstStyle/>
                     <a:p>
                       <a:r>
-                        <a:rPr sz="1300" b="0">
+                        <a:rPr sz="1400" b="0">
                           <a:solidFill>
                             <a:srgbClr val="1C1C1A"/>
                           </a:solidFill>
@@ -4505,11 +4431,7 @@
                       </a:r>
                     </a:p>
                   </a:txBody>
-                  <a:tcPr marL="91440" marR="91440" marT="36576" marB="36576">
-                    <a:solidFill>
-                      <a:srgbClr val="F7F7F5"/>
-                    </a:solidFill>
-                  </a:tcPr>
+                  <a:tcPr marT="25400" marB="25400"/>
                 </a:tc>
                 <a:tc>
                   <a:txBody>
@@ -4517,7 +4439,7 @@
                     <a:lstStyle/>
                     <a:p>
                       <a:r>
-                        <a:rPr sz="1300" b="0">
+                        <a:rPr sz="1400" b="0">
                           <a:solidFill>
                             <a:srgbClr val="1C1C1A"/>
                           </a:solidFill>
@@ -4527,11 +4449,7 @@
                       </a:r>
                     </a:p>
                   </a:txBody>
-                  <a:tcPr marL="91440" marR="91440" marT="36576" marB="36576">
-                    <a:solidFill>
-                      <a:srgbClr val="F7F7F5"/>
-                    </a:solidFill>
-                  </a:tcPr>
+                  <a:tcPr marT="25400" marB="25400"/>
                 </a:tc>
                 <a:tc>
                   <a:txBody>
@@ -4539,7 +4457,7 @@
                     <a:lstStyle/>
                     <a:p>
                       <a:r>
-                        <a:rPr sz="1300" b="0">
+                        <a:rPr sz="1400" b="0">
                           <a:solidFill>
                             <a:srgbClr val="1C1C1A"/>
                           </a:solidFill>
@@ -4549,21 +4467,17 @@
                       </a:r>
                     </a:p>
                   </a:txBody>
-                  <a:tcPr marL="91440" marR="91440" marT="36576" marB="36576">
-                    <a:solidFill>
-                      <a:srgbClr val="F7F7F5"/>
-                    </a:solidFill>
-                  </a:tcPr>
+                  <a:tcPr marT="25400" marB="25400"/>
                 </a:tc>
               </a:tr>
-              <a:tr h="586740">
+              <a:tr h="384048">
                 <a:tc>
                   <a:txBody>
                     <a:bodyPr/>
                     <a:lstStyle/>
                     <a:p>
                       <a:r>
-                        <a:rPr sz="1300" b="0">
+                        <a:rPr sz="1400" b="0">
                           <a:solidFill>
                             <a:srgbClr val="1C1C1A"/>
                           </a:solidFill>
@@ -4573,11 +4487,7 @@
                       </a:r>
                     </a:p>
                   </a:txBody>
-                  <a:tcPr marL="91440" marR="91440" marT="36576" marB="36576">
-                    <a:solidFill>
-                      <a:srgbClr val="F7F7F5"/>
-                    </a:solidFill>
-                  </a:tcPr>
+                  <a:tcPr marT="25400" marB="25400"/>
                 </a:tc>
                 <a:tc>
                   <a:txBody>
@@ -4585,7 +4495,7 @@
                     <a:lstStyle/>
                     <a:p>
                       <a:r>
-                        <a:rPr sz="1300" b="0">
+                        <a:rPr sz="1400" b="0">
                           <a:solidFill>
                             <a:srgbClr val="1C1C1A"/>
                           </a:solidFill>
@@ -4595,11 +4505,7 @@
                       </a:r>
                     </a:p>
                   </a:txBody>
-                  <a:tcPr marL="91440" marR="91440" marT="36576" marB="36576">
-                    <a:solidFill>
-                      <a:srgbClr val="F7F7F5"/>
-                    </a:solidFill>
-                  </a:tcPr>
+                  <a:tcPr marT="25400" marB="25400"/>
                 </a:tc>
                 <a:tc>
                   <a:txBody>
@@ -4607,7 +4513,7 @@
                     <a:lstStyle/>
                     <a:p>
                       <a:r>
-                        <a:rPr sz="1300" b="0">
+                        <a:rPr sz="1400" b="0">
                           <a:solidFill>
                             <a:srgbClr val="1C1C1A"/>
                           </a:solidFill>
@@ -4617,21 +4523,17 @@
                       </a:r>
                     </a:p>
                   </a:txBody>
-                  <a:tcPr marL="91440" marR="91440" marT="36576" marB="36576">
-                    <a:solidFill>
-                      <a:srgbClr val="F7F7F5"/>
-                    </a:solidFill>
-                  </a:tcPr>
+                  <a:tcPr marT="25400" marB="25400"/>
                 </a:tc>
               </a:tr>
-              <a:tr h="586740">
+              <a:tr h="384048">
                 <a:tc>
                   <a:txBody>
                     <a:bodyPr/>
                     <a:lstStyle/>
                     <a:p>
                       <a:r>
-                        <a:rPr sz="1300" b="0">
+                        <a:rPr sz="1400" b="0">
                           <a:solidFill>
                             <a:srgbClr val="1C1C1A"/>
                           </a:solidFill>
@@ -4641,11 +4543,7 @@
                       </a:r>
                     </a:p>
                   </a:txBody>
-                  <a:tcPr marL="91440" marR="91440" marT="36576" marB="36576">
-                    <a:solidFill>
-                      <a:srgbClr val="F7F7F5"/>
-                    </a:solidFill>
-                  </a:tcPr>
+                  <a:tcPr marT="25400" marB="25400"/>
                 </a:tc>
                 <a:tc>
                   <a:txBody>
@@ -4653,7 +4551,7 @@
                     <a:lstStyle/>
                     <a:p>
                       <a:r>
-                        <a:rPr sz="1300" b="0">
+                        <a:rPr sz="1400" b="0">
                           <a:solidFill>
                             <a:srgbClr val="1C1C1A"/>
                           </a:solidFill>
@@ -4663,11 +4561,7 @@
                       </a:r>
                     </a:p>
                   </a:txBody>
-                  <a:tcPr marL="91440" marR="91440" marT="36576" marB="36576">
-                    <a:solidFill>
-                      <a:srgbClr val="F7F7F5"/>
-                    </a:solidFill>
-                  </a:tcPr>
+                  <a:tcPr marT="25400" marB="25400"/>
                 </a:tc>
                 <a:tc>
                   <a:txBody>
@@ -4675,7 +4569,7 @@
                     <a:lstStyle/>
                     <a:p>
                       <a:r>
-                        <a:rPr sz="1300" b="0">
+                        <a:rPr sz="1400" b="0">
                           <a:solidFill>
                             <a:srgbClr val="1C1C1A"/>
                           </a:solidFill>
@@ -4685,11 +4579,7 @@
                       </a:r>
                     </a:p>
                   </a:txBody>
-                  <a:tcPr marL="91440" marR="91440" marT="36576" marB="36576">
-                    <a:solidFill>
-                      <a:srgbClr val="F7F7F5"/>
-                    </a:solidFill>
-                  </a:tcPr>
+                  <a:tcPr marT="25400" marB="25400"/>
                 </a:tc>
               </a:tr>
             </a:tbl>
@@ -4704,7 +4594,7 @@
         </p:nvSpPr>
         <p:spPr>
           <a:xfrm>
-            <a:off x="777240" y="6263640"/>
+            <a:off x="777240" y="6309360"/>
             <a:ext cx="10607040" cy="365760"/>
           </a:xfrm>
           <a:prstGeom prst="rect">
@@ -4713,13 +4603,13 @@
           <a:noFill/>
         </p:spPr>
         <p:txBody>
-          <a:bodyPr wrap="square">
+          <a:bodyPr wrap="none">
             <a:spAutoFit/>
           </a:bodyPr>
           <a:lstStyle/>
           <a:p>
             <a:r>
-              <a:rPr sz="1000" b="0">
+              <a:rPr sz="1000">
                 <a:solidFill>
                   <a:srgbClr val="5F6360"/>
                 </a:solidFill>
@@ -4835,7 +4725,7 @@
         <p:spPr>
           <a:xfrm>
             <a:off x="777240" y="1965960"/>
-            <a:ext cx="10607040" cy="4206240"/>
+            <a:ext cx="10607040" cy="1781175"/>
           </a:xfrm>
           <a:prstGeom prst="rect">
             <a:avLst/>
@@ -4848,9 +4738,13 @@
           </a:bodyPr>
           <a:lstStyle/>
           <a:p>
-            <a:pPr algn="l"/>
-            <a:r>
-              <a:rPr b="0" sz="2100">
+            <a:pPr>
+              <a:spcAft>
+                <a:spcPts val="1000"/>
+              </a:spcAft>
+            </a:pPr>
+            <a:r>
+              <a:rPr sz="2100" b="0">
                 <a:solidFill>
                   <a:srgbClr val="1C1C1A"/>
                 </a:solidFill>
@@ -4860,45 +4754,29 @@
             </a:r>
           </a:p>
           <a:p>
-            <a:pPr algn="l"/>
-            <a:r>
-              <a:rPr b="0" sz="2100">
+            <a:pPr>
+              <a:spcAft>
+                <a:spcPts val="1000"/>
+              </a:spcAft>
+            </a:pPr>
+            <a:r>
+              <a:rPr sz="2100" b="0">
                 <a:solidFill>
                   <a:srgbClr val="1C1C1A"/>
                 </a:solidFill>
                 <a:latin typeface="Calibri"/>
               </a:rPr>
-              <a:t> </a:t>
-            </a:r>
-          </a:p>
-          <a:p>
-            <a:pPr algn="l"/>
-            <a:r>
-              <a:rPr b="0" sz="2100">
-                <a:solidFill>
-                  <a:srgbClr val="1C1C1A"/>
-                </a:solidFill>
-                <a:latin typeface="Calibri"/>
-              </a:rPr>
               <a:t>The three major exams fall in Weeks 5, 10 and 15. Each one runs across its week as a continuous activity.</a:t>
             </a:r>
           </a:p>
           <a:p>
-            <a:pPr algn="l"/>
-            <a:r>
-              <a:rPr b="0" sz="2100">
-                <a:solidFill>
-                  <a:srgbClr val="1C1C1A"/>
-                </a:solidFill>
-                <a:latin typeface="Calibri"/>
-              </a:rPr>
-              <a:t> </a:t>
-            </a:r>
-          </a:p>
-          <a:p>
-            <a:pPr algn="l"/>
-            <a:r>
-              <a:rPr b="0" sz="2100">
+            <a:pPr>
+              <a:spcAft>
+                <a:spcPts val="1000"/>
+              </a:spcAft>
+            </a:pPr>
+            <a:r>
+              <a:rPr sz="2100" b="0">
                 <a:solidFill>
                   <a:srgbClr val="1C1C1A"/>
                 </a:solidFill>
@@ -4917,7 +4795,7 @@
         </p:nvSpPr>
         <p:spPr>
           <a:xfrm>
-            <a:off x="777240" y="6263640"/>
+            <a:off x="777240" y="6309360"/>
             <a:ext cx="10607040" cy="365760"/>
           </a:xfrm>
           <a:prstGeom prst="rect">
@@ -4926,13 +4804,13 @@
           <a:noFill/>
         </p:spPr>
         <p:txBody>
-          <a:bodyPr wrap="square">
+          <a:bodyPr wrap="none">
             <a:spAutoFit/>
           </a:bodyPr>
           <a:lstStyle/>
           <a:p>
             <a:r>
-              <a:rPr sz="1000" b="0">
+              <a:rPr sz="1000">
                 <a:solidFill>
                   <a:srgbClr val="5F6360"/>
                 </a:solidFill>
@@ -5048,7 +4926,7 @@
         <p:spPr>
           <a:xfrm>
             <a:off x="777240" y="1965960"/>
-            <a:ext cx="10607040" cy="4206240"/>
+            <a:ext cx="10607040" cy="2647950"/>
           </a:xfrm>
           <a:prstGeom prst="rect">
             <a:avLst/>
@@ -5061,9 +4939,13 @@
           </a:bodyPr>
           <a:lstStyle/>
           <a:p>
-            <a:pPr algn="l"/>
-            <a:r>
-              <a:rPr b="0" sz="2100">
+            <a:pPr>
+              <a:spcAft>
+                <a:spcPts val="1000"/>
+              </a:spcAft>
+            </a:pPr>
+            <a:r>
+              <a:rPr sz="2100" b="0">
                 <a:solidFill>
                   <a:srgbClr val="1C1C1A"/>
                 </a:solidFill>
@@ -5073,75 +4955,51 @@
             </a:r>
           </a:p>
           <a:p>
-            <a:pPr algn="l"/>
-            <a:r>
-              <a:rPr b="0" sz="2100">
+            <a:pPr>
+              <a:spcAft>
+                <a:spcPts val="1000"/>
+              </a:spcAft>
+            </a:pPr>
+            <a:r>
+              <a:rPr sz="2100" b="0">
                 <a:solidFill>
                   <a:srgbClr val="1C1C1A"/>
                 </a:solidFill>
                 <a:latin typeface="Calibri"/>
               </a:rPr>
-              <a:t> </a:t>
-            </a:r>
-          </a:p>
-          <a:p>
-            <a:pPr algn="l"/>
-            <a:r>
-              <a:rPr b="0" sz="2100">
+              <a:t>Tuesday: you can package a rule into a function, survive a bad record by name, log why you rejected it, and move data across the file boundary.</a:t>
+            </a:r>
+          </a:p>
+          <a:p>
+            <a:pPr>
+              <a:spcAft>
+                <a:spcPts val="1000"/>
+              </a:spcAft>
+            </a:pPr>
+            <a:r>
+              <a:rPr sz="2100" b="0">
                 <a:solidFill>
                   <a:srgbClr val="1C1C1A"/>
                 </a:solidFill>
                 <a:latin typeface="Calibri"/>
               </a:rPr>
-              <a:t>Tuesday: you can package a rule into a function you call again, survive a bad record by name, log why you rejected it, and move data across the file boundary in both directions.</a:t>
-            </a:r>
-          </a:p>
-          <a:p>
-            <a:pPr algn="l"/>
-            <a:r>
-              <a:rPr b="0" sz="2100">
+              <a:t>Wednesday: you can profile a dataset before you touch it, clean it with a reason written behind every decision, and prove that input equals clean plus rejected.</a:t>
+            </a:r>
+          </a:p>
+          <a:p>
+            <a:pPr>
+              <a:spcAft>
+                <a:spcPts val="1000"/>
+              </a:spcAft>
+            </a:pPr>
+            <a:r>
+              <a:rPr sz="2100" b="0">
                 <a:solidFill>
                   <a:srgbClr val="1C1C1A"/>
                 </a:solidFill>
                 <a:latin typeface="Calibri"/>
               </a:rPr>
-              <a:t> </a:t>
-            </a:r>
-          </a:p>
-          <a:p>
-            <a:pPr algn="l"/>
-            <a:r>
-              <a:rPr b="0" sz="2100">
-                <a:solidFill>
-                  <a:srgbClr val="1C1C1A"/>
-                </a:solidFill>
-                <a:latin typeface="Calibri"/>
-              </a:rPr>
-              <a:t>Wednesday: you can profile a dataset before you touch it, clean it with a written reason behind every decision, and prove that input equals clean plus rejected.</a:t>
-            </a:r>
-          </a:p>
-          <a:p>
-            <a:pPr algn="l"/>
-            <a:r>
-              <a:rPr b="0" sz="2100">
-                <a:solidFill>
-                  <a:srgbClr val="1C1C1A"/>
-                </a:solidFill>
-                <a:latin typeface="Calibri"/>
-              </a:rPr>
-              <a:t> </a:t>
-            </a:r>
-          </a:p>
-          <a:p>
-            <a:pPr algn="l"/>
-            <a:r>
-              <a:rPr b="0" sz="2100">
-                <a:solidFill>
-                  <a:srgbClr val="1C1C1A"/>
-                </a:solidFill>
-                <a:latin typeface="Calibri"/>
-              </a:rPr>
-              <a:t>Thursday: you can say what is typical and how spread out the data is without misleading anyone, and hand over a segment summary that carries its denominators.</a:t>
+              <a:t>Thursday: you can say what is typical without misleading anyone, and hand over a segment summary that carries its denominators.</a:t>
             </a:r>
           </a:p>
         </p:txBody>
@@ -5154,7 +5012,7 @@
         </p:nvSpPr>
         <p:spPr>
           <a:xfrm>
-            <a:off x="777240" y="6263640"/>
+            <a:off x="777240" y="6309360"/>
             <a:ext cx="10607040" cy="365760"/>
           </a:xfrm>
           <a:prstGeom prst="rect">
@@ -5163,13 +5021,13 @@
           <a:noFill/>
         </p:spPr>
         <p:txBody>
-          <a:bodyPr wrap="square">
+          <a:bodyPr wrap="none">
             <a:spAutoFit/>
           </a:bodyPr>
           <a:lstStyle/>
           <a:p>
             <a:r>
-              <a:rPr sz="1000" b="0">
+              <a:rPr sz="1000">
                 <a:solidFill>
                   <a:srgbClr val="5F6360"/>
                 </a:solidFill>
@@ -5285,7 +5143,7 @@
         <p:spPr>
           <a:xfrm>
             <a:off x="777240" y="1965960"/>
-            <a:ext cx="10607040" cy="4206240"/>
+            <a:ext cx="10607040" cy="1409700"/>
           </a:xfrm>
           <a:prstGeom prst="rect">
             <a:avLst/>
@@ -5298,9 +5156,13 @@
           </a:bodyPr>
           <a:lstStyle/>
           <a:p>
-            <a:pPr algn="l"/>
-            <a:r>
-              <a:rPr b="0" sz="2100">
+            <a:pPr>
+              <a:spcAft>
+                <a:spcPts val="1000"/>
+              </a:spcAft>
+            </a:pPr>
+            <a:r>
+              <a:rPr sz="2100" b="0">
                 <a:solidFill>
                   <a:srgbClr val="1C1C1A"/>
                 </a:solidFill>
@@ -5310,21 +5172,13 @@
             </a:r>
           </a:p>
           <a:p>
-            <a:pPr algn="l"/>
-            <a:r>
-              <a:rPr b="0" sz="2100">
-                <a:solidFill>
-                  <a:srgbClr val="1C1C1A"/>
-                </a:solidFill>
-                <a:latin typeface="Calibri"/>
-              </a:rPr>
-              <a:t> </a:t>
-            </a:r>
-          </a:p>
-          <a:p>
-            <a:pPr algn="l"/>
-            <a:r>
-              <a:rPr b="0" sz="2100">
+            <a:pPr>
+              <a:spcAft>
+                <a:spcPts val="1000"/>
+              </a:spcAft>
+            </a:pPr>
+            <a:r>
+              <a:rPr sz="2100" b="0">
                 <a:solidFill>
                   <a:srgbClr val="1C1C1A"/>
                 </a:solidFill>
@@ -5343,7 +5197,7 @@
         </p:nvSpPr>
         <p:spPr>
           <a:xfrm>
-            <a:off x="777240" y="6263640"/>
+            <a:off x="777240" y="6309360"/>
             <a:ext cx="10607040" cy="365760"/>
           </a:xfrm>
           <a:prstGeom prst="rect">
@@ -5352,13 +5206,13 @@
           <a:noFill/>
         </p:spPr>
         <p:txBody>
-          <a:bodyPr wrap="square">
+          <a:bodyPr wrap="none">
             <a:spAutoFit/>
           </a:bodyPr>
           <a:lstStyle/>
           <a:p>
             <a:r>
-              <a:rPr sz="1000" b="0">
+              <a:rPr sz="1000">
                 <a:solidFill>
                   <a:srgbClr val="5F6360"/>
                 </a:solidFill>
@@ -5474,7 +5328,7 @@
         <p:spPr>
           <a:xfrm>
             <a:off x="777240" y="1965960"/>
-            <a:ext cx="10607040" cy="4206240"/>
+            <a:ext cx="10607040" cy="914400"/>
           </a:xfrm>
           <a:prstGeom prst="rect">
             <a:avLst/>
@@ -5487,9 +5341,13 @@
           </a:bodyPr>
           <a:lstStyle/>
           <a:p>
-            <a:pPr algn="l"/>
-            <a:r>
-              <a:rPr b="0" sz="2100">
+            <a:pPr>
+              <a:spcAft>
+                <a:spcPts val="1000"/>
+              </a:spcAft>
+            </a:pPr>
+            <a:r>
+              <a:rPr sz="2100" b="0">
                 <a:solidFill>
                   <a:srgbClr val="1C1C1A"/>
                 </a:solidFill>
@@ -5499,21 +5357,13 @@
             </a:r>
           </a:p>
           <a:p>
-            <a:pPr algn="l"/>
-            <a:r>
-              <a:rPr b="0" sz="2100">
-                <a:solidFill>
-                  <a:srgbClr val="1C1C1A"/>
-                </a:solidFill>
-                <a:latin typeface="Calibri"/>
-              </a:rPr>
-              <a:t> </a:t>
-            </a:r>
-          </a:p>
-          <a:p>
-            <a:pPr algn="l"/>
-            <a:r>
-              <a:rPr b="0" sz="2100">
+            <a:pPr>
+              <a:spcAft>
+                <a:spcPts val="1000"/>
+              </a:spcAft>
+            </a:pPr>
+            <a:r>
+              <a:rPr sz="2100" b="0">
                 <a:solidFill>
                   <a:srgbClr val="1C1C1A"/>
                 </a:solidFill>
@@ -5532,7 +5382,7 @@
         </p:nvSpPr>
         <p:spPr>
           <a:xfrm>
-            <a:off x="777240" y="6263640"/>
+            <a:off x="777240" y="6309360"/>
             <a:ext cx="10607040" cy="365760"/>
           </a:xfrm>
           <a:prstGeom prst="rect">
@@ -5541,13 +5391,13 @@
           <a:noFill/>
         </p:spPr>
         <p:txBody>
-          <a:bodyPr wrap="square">
+          <a:bodyPr wrap="none">
             <a:spAutoFit/>
           </a:bodyPr>
           <a:lstStyle/>
           <a:p>
             <a:r>
-              <a:rPr sz="1000" b="0">
+              <a:rPr sz="1000">
                 <a:solidFill>
                   <a:srgbClr val="5F6360"/>
                 </a:solidFill>
@@ -5663,7 +5513,7 @@
         <p:spPr>
           <a:xfrm>
             <a:off x="777240" y="1965960"/>
-            <a:ext cx="10607040" cy="4206240"/>
+            <a:ext cx="10607040" cy="3267075"/>
           </a:xfrm>
           <a:prstGeom prst="rect">
             <a:avLst/>
@@ -5676,129 +5526,83 @@
           </a:bodyPr>
           <a:lstStyle/>
           <a:p>
-            <a:pPr algn="l"/>
-            <a:r>
-              <a:rPr b="0" sz="2100">
+            <a:pPr>
+              <a:spcAft>
+                <a:spcPts val="1000"/>
+              </a:spcAft>
+            </a:pPr>
+            <a:r>
+              <a:rPr sz="2100" b="0">
                 <a:solidFill>
                   <a:srgbClr val="1C1C1A"/>
                 </a:solidFill>
                 <a:latin typeface="Calibri"/>
               </a:rPr>
-              <a:t>You understand that the kernel holds what you gave it between runs, that a value's type decides what an operator means, and that a dataset is a list of named records.</a:t>
-            </a:r>
-          </a:p>
-          <a:p>
-            <a:pPr algn="l"/>
-            <a:r>
-              <a:rPr b="0" sz="2100">
+              <a:t>You understand that the kernel holds what you gave it, that a value's type decides what an operator means, and that a dataset is a list of named records.</a:t>
+            </a:r>
+          </a:p>
+          <a:p>
+            <a:pPr>
+              <a:spcAft>
+                <a:spcPts val="1000"/>
+              </a:spcAft>
+            </a:pPr>
+            <a:r>
+              <a:rPr sz="2100" b="0">
                 <a:solidFill>
                   <a:srgbClr val="1C1C1A"/>
                 </a:solidFill>
                 <a:latin typeface="Calibri"/>
               </a:rPr>
-              <a:t> </a:t>
-            </a:r>
-          </a:p>
-          <a:p>
-            <a:pPr algn="l"/>
-            <a:r>
-              <a:rPr b="0" sz="2100">
+              <a:t>You can launch the Codespace, run and recover the notebook, and answer counting and totalling questions with a loop, a condition and an accumulator.</a:t>
+            </a:r>
+          </a:p>
+          <a:p>
+            <a:pPr>
+              <a:spcAft>
+                <a:spcPts val="1000"/>
+              </a:spcAft>
+            </a:pPr>
+            <a:r>
+              <a:rPr sz="2100" b="0">
                 <a:solidFill>
                   <a:srgbClr val="1C1C1A"/>
                 </a:solidFill>
                 <a:latin typeface="Calibri"/>
               </a:rPr>
-              <a:t>You can launch the Codespace, run and edit and recover the notebook, and answer counting and totalling questions with a loop, a condition and an accumulator.</a:t>
-            </a:r>
-          </a:p>
-          <a:p>
-            <a:pPr algn="l"/>
-            <a:r>
-              <a:rPr b="0" sz="2100">
+              <a:t>You can handle a NameError from cells run out of order, a TypeError when a text amount meets a number, and a missing key through .get() with a default you chose.</a:t>
+            </a:r>
+          </a:p>
+          <a:p>
+            <a:pPr>
+              <a:spcAft>
+                <a:spcPts val="1000"/>
+              </a:spcAft>
+            </a:pPr>
+            <a:r>
+              <a:rPr sz="2100" b="0">
                 <a:solidFill>
                   <a:srgbClr val="1C1C1A"/>
                 </a:solidFill>
                 <a:latin typeface="Calibri"/>
               </a:rPr>
-              <a:t> </a:t>
-            </a:r>
-          </a:p>
-          <a:p>
-            <a:pPr algn="l"/>
-            <a:r>
-              <a:rPr b="0" sz="2100">
+              <a:t>You can defend what a kernel restart resets, and say why refusing a cross-type comparison is safer than a spreadsheet quietly guessing.</a:t>
+            </a:r>
+          </a:p>
+          <a:p>
+            <a:pPr>
+              <a:spcAft>
+                <a:spcPts val="1000"/>
+              </a:spcAft>
+            </a:pPr>
+            <a:r>
+              <a:rPr sz="2100" b="0">
                 <a:solidFill>
                   <a:srgbClr val="1C1C1A"/>
                 </a:solidFill>
                 <a:latin typeface="Calibri"/>
               </a:rPr>
-              <a:t>You can handle a NameError that came from running cells out of order, a TypeError when a text amount meets a number, and a missing key through </a:t>
-            </a:r>
-            <a:r>
-              <a:rPr b="0" sz="1800">
-                <a:solidFill>
-                  <a:srgbClr val="2B4A7D"/>
-                </a:solidFill>
-                <a:latin typeface="Consolas"/>
-              </a:rPr>
-              <a:t>.get()</a:t>
-            </a:r>
-            <a:r>
-              <a:rPr b="0" sz="2100">
-                <a:solidFill>
-                  <a:srgbClr val="1C1C1A"/>
-                </a:solidFill>
-                <a:latin typeface="Calibri"/>
-              </a:rPr>
-              <a:t> with a default you chose on purpose.</a:t>
-            </a:r>
-          </a:p>
-          <a:p>
-            <a:pPr algn="l"/>
-            <a:r>
-              <a:rPr b="0" sz="2100">
-                <a:solidFill>
-                  <a:srgbClr val="1C1C1A"/>
-                </a:solidFill>
-                <a:latin typeface="Calibri"/>
-              </a:rPr>
-              <a:t> </a:t>
-            </a:r>
-          </a:p>
-          <a:p>
-            <a:pPr algn="l"/>
-            <a:r>
-              <a:rPr b="0" sz="2100">
-                <a:solidFill>
-                  <a:srgbClr val="1C1C1A"/>
-                </a:solidFill>
-                <a:latin typeface="Calibri"/>
-              </a:rPr>
-              <a:t>You can defend what a kernel restart resets, and say why refusing a cross-type comparison is safer than a spreadsheet quietly guessing.</a:t>
-            </a:r>
-          </a:p>
-          <a:p>
-            <a:pPr algn="l"/>
-            <a:r>
-              <a:rPr b="0" sz="2100">
-                <a:solidFill>
-                  <a:srgbClr val="1C1C1A"/>
-                </a:solidFill>
-                <a:latin typeface="Calibri"/>
-              </a:rPr>
-              <a:t> </a:t>
-            </a:r>
-          </a:p>
-          <a:p>
-            <a:pPr algn="l"/>
-            <a:r>
-              <a:rPr b="0" sz="2100">
-                <a:solidFill>
-                  <a:srgbClr val="1C1C1A"/>
-                </a:solidFill>
-                <a:latin typeface="Calibri"/>
-              </a:rPr>
-              <a:t>The one line to carry out of today. You can take thirty records nobody explained to you and come back with a number, and you can say what would break it.</a:t>
+              <a:t>The line to carry out of today: you can take thirty records nobody explained to you and come back with a number, and you can say what would break it.</a:t>
             </a:r>
           </a:p>
         </p:txBody>
@@ -5811,7 +5615,7 @@
         </p:nvSpPr>
         <p:spPr>
           <a:xfrm>
-            <a:off x="777240" y="6263640"/>
+            <a:off x="777240" y="6309360"/>
             <a:ext cx="10607040" cy="365760"/>
           </a:xfrm>
           <a:prstGeom prst="rect">
@@ -5820,13 +5624,13 @@
           <a:noFill/>
         </p:spPr>
         <p:txBody>
-          <a:bodyPr wrap="square">
+          <a:bodyPr wrap="none">
             <a:spAutoFit/>
           </a:bodyPr>
           <a:lstStyle/>
           <a:p>
             <a:r>
-              <a:rPr sz="1000" b="0">
+              <a:rPr sz="1000">
                 <a:solidFill>
                   <a:srgbClr val="5F6360"/>
                 </a:solidFill>
@@ -5942,7 +5746,7 @@
         <p:spPr>
           <a:xfrm>
             <a:off x="777240" y="1965960"/>
-            <a:ext cx="10607040" cy="4206240"/>
+            <a:ext cx="10607040" cy="1162050"/>
           </a:xfrm>
           <a:prstGeom prst="rect">
             <a:avLst/>
@@ -5955,33 +5759,29 @@
           </a:bodyPr>
           <a:lstStyle/>
           <a:p>
-            <a:pPr algn="l"/>
-            <a:r>
-              <a:rPr b="0" sz="1800">
-                <a:solidFill>
-                  <a:srgbClr val="2B4A7D"/>
-                </a:solidFill>
-                <a:latin typeface="Consolas"/>
+            <a:pPr>
+              <a:spcAft>
+                <a:spcPts val="1000"/>
+              </a:spcAft>
+            </a:pPr>
+            <a:r>
+              <a:rPr sz="2100" b="0">
+                <a:solidFill>
+                  <a:srgbClr val="1C1C1A"/>
+                </a:solidFill>
+                <a:latin typeface="Calibri"/>
               </a:rPr>
               <a:t>[the company] &gt; [the journey] &gt; [the room]</a:t>
             </a:r>
           </a:p>
           <a:p>
-            <a:pPr algn="l"/>
-            <a:r>
-              <a:rPr b="0" sz="2100">
-                <a:solidFill>
-                  <a:srgbClr val="1C1C1A"/>
-                </a:solidFill>
-                <a:latin typeface="Calibri"/>
-              </a:rPr>
-              <a:t> </a:t>
-            </a:r>
-          </a:p>
-          <a:p>
-            <a:pPr algn="l"/>
-            <a:r>
-              <a:rPr b="0" sz="2100">
+            <a:pPr>
+              <a:spcAft>
+                <a:spcPts val="1000"/>
+              </a:spcAft>
+            </a:pPr>
+            <a:r>
+              <a:rPr sz="2100" b="0">
                 <a:solidFill>
                   <a:srgbClr val="1C1C1A"/>
                 </a:solidFill>
@@ -6000,7 +5800,7 @@
         </p:nvSpPr>
         <p:spPr>
           <a:xfrm>
-            <a:off x="777240" y="6263640"/>
+            <a:off x="777240" y="6309360"/>
             <a:ext cx="10607040" cy="365760"/>
           </a:xfrm>
           <a:prstGeom prst="rect">
@@ -6009,13 +5809,13 @@
           <a:noFill/>
         </p:spPr>
         <p:txBody>
-          <a:bodyPr wrap="square">
+          <a:bodyPr wrap="none">
             <a:spAutoFit/>
           </a:bodyPr>
           <a:lstStyle/>
           <a:p>
             <a:r>
-              <a:rPr sz="1000" b="0">
+              <a:rPr sz="1000">
                 <a:solidFill>
                   <a:srgbClr val="5F6360"/>
                 </a:solidFill>
@@ -6110,6 +5910,7 @@
           </a:bodyPr>
           <a:lstStyle/>
           <a:p>
+            <a:pPr algn="ctr"/>
             <a:r>
               <a:rPr sz="3600" b="1">
                 <a:solidFill>
@@ -6131,7 +5932,7 @@
         <p:spPr>
           <a:xfrm>
             <a:off x="777240" y="1965960"/>
-            <a:ext cx="10607040" cy="4206240"/>
+            <a:ext cx="10607040" cy="542925"/>
           </a:xfrm>
           <a:prstGeom prst="rect">
             <a:avLst/>
@@ -6144,22 +5945,26 @@
           </a:bodyPr>
           <a:lstStyle/>
           <a:p>
-            <a:pPr algn="l"/>
-            <a:r>
-              <a:rPr b="0" sz="1800">
+            <a:pPr algn="ctr">
+              <a:spcAft>
+                <a:spcPts val="1000"/>
+              </a:spcAft>
+            </a:pPr>
+            <a:r>
+              <a:rPr sz="2100" b="0">
                 <a:solidFill>
                   <a:srgbClr val="FFFFFF"/>
                 </a:solidFill>
-                <a:latin typeface="Consolas"/>
+                <a:latin typeface="Calibri"/>
               </a:rPr>
               <a:t>[the company] &gt; [the journey] &gt; </a:t>
             </a:r>
             <a:r>
-              <a:rPr b="1" sz="1800">
+              <a:rPr sz="2100" b="1">
                 <a:solidFill>
                   <a:srgbClr val="FFFFFF"/>
                 </a:solidFill>
-                <a:latin typeface="Consolas"/>
+                <a:latin typeface="Calibri"/>
               </a:rPr>
               <a:t>[the room]</a:t>
             </a:r>
@@ -6174,7 +5979,7 @@
         </p:nvSpPr>
         <p:spPr>
           <a:xfrm>
-            <a:off x="777240" y="6263640"/>
+            <a:off x="777240" y="6309360"/>
             <a:ext cx="10607040" cy="365760"/>
           </a:xfrm>
           <a:prstGeom prst="rect">
@@ -6183,13 +5988,13 @@
           <a:noFill/>
         </p:spPr>
         <p:txBody>
-          <a:bodyPr wrap="square">
+          <a:bodyPr wrap="none">
             <a:spAutoFit/>
           </a:bodyPr>
           <a:lstStyle/>
           <a:p>
             <a:r>
-              <a:rPr sz="1000" b="0">
+              <a:rPr sz="1000">
                 <a:solidFill>
                   <a:srgbClr val="5F6360"/>
                 </a:solidFill>
@@ -6305,7 +6110,7 @@
         <p:spPr>
           <a:xfrm>
             <a:off x="777240" y="1965960"/>
-            <a:ext cx="10607040" cy="4206240"/>
+            <a:ext cx="10607040" cy="3762374"/>
           </a:xfrm>
           <a:prstGeom prst="rect">
             <a:avLst/>
@@ -6318,9 +6123,13 @@
           </a:bodyPr>
           <a:lstStyle/>
           <a:p>
-            <a:pPr algn="l"/>
-            <a:r>
-              <a:rPr b="0" sz="2100">
+            <a:pPr>
+              <a:spcAft>
+                <a:spcPts val="1000"/>
+              </a:spcAft>
+            </a:pPr>
+            <a:r>
+              <a:rPr sz="2100" b="0">
                 <a:solidFill>
                   <a:srgbClr val="1C1C1A"/>
                 </a:solidFill>
@@ -6330,9 +6139,13 @@
             </a:r>
           </a:p>
           <a:p>
-            <a:pPr algn="l"/>
-            <a:r>
-              <a:rPr b="0" sz="2100">
+            <a:pPr>
+              <a:spcAft>
+                <a:spcPts val="1000"/>
+              </a:spcAft>
+            </a:pPr>
+            <a:r>
+              <a:rPr sz="2100" b="0">
                 <a:solidFill>
                   <a:srgbClr val="1C1C1A"/>
                 </a:solidFill>
@@ -6342,9 +6155,13 @@
             </a:r>
           </a:p>
           <a:p>
-            <a:pPr algn="l"/>
-            <a:r>
-              <a:rPr b="0" sz="2100">
+            <a:pPr>
+              <a:spcAft>
+                <a:spcPts val="1000"/>
+              </a:spcAft>
+            </a:pPr>
+            <a:r>
+              <a:rPr sz="2100" b="0">
                 <a:solidFill>
                   <a:srgbClr val="1C1C1A"/>
                 </a:solidFill>
@@ -6354,9 +6171,13 @@
             </a:r>
           </a:p>
           <a:p>
-            <a:pPr algn="l"/>
-            <a:r>
-              <a:rPr b="0" sz="2100">
+            <a:pPr>
+              <a:spcAft>
+                <a:spcPts val="1000"/>
+              </a:spcAft>
+            </a:pPr>
+            <a:r>
+              <a:rPr sz="2100" b="0">
                 <a:solidFill>
                   <a:srgbClr val="1C1C1A"/>
                 </a:solidFill>
@@ -6366,9 +6187,13 @@
             </a:r>
           </a:p>
           <a:p>
-            <a:pPr algn="l"/>
-            <a:r>
-              <a:rPr b="0" sz="2100">
+            <a:pPr>
+              <a:spcAft>
+                <a:spcPts val="1000"/>
+              </a:spcAft>
+            </a:pPr>
+            <a:r>
+              <a:rPr sz="2100" b="0">
                 <a:solidFill>
                   <a:srgbClr val="1C1C1A"/>
                 </a:solidFill>
@@ -6378,9 +6203,13 @@
             </a:r>
           </a:p>
           <a:p>
-            <a:pPr algn="l"/>
-            <a:r>
-              <a:rPr b="0" sz="2100">
+            <a:pPr>
+              <a:spcAft>
+                <a:spcPts val="1000"/>
+              </a:spcAft>
+            </a:pPr>
+            <a:r>
+              <a:rPr sz="2100" b="0">
                 <a:solidFill>
                   <a:srgbClr val="1C1C1A"/>
                 </a:solidFill>
@@ -6390,9 +6219,13 @@
             </a:r>
           </a:p>
           <a:p>
-            <a:pPr algn="l"/>
-            <a:r>
-              <a:rPr b="0" sz="2100">
+            <a:pPr>
+              <a:spcAft>
+                <a:spcPts val="1000"/>
+              </a:spcAft>
+            </a:pPr>
+            <a:r>
+              <a:rPr sz="2100" b="0">
                 <a:solidFill>
                   <a:srgbClr val="1C1C1A"/>
                 </a:solidFill>
@@ -6411,7 +6244,7 @@
         </p:nvSpPr>
         <p:spPr>
           <a:xfrm>
-            <a:off x="777240" y="6263640"/>
+            <a:off x="777240" y="6309360"/>
             <a:ext cx="10607040" cy="365760"/>
           </a:xfrm>
           <a:prstGeom prst="rect">
@@ -6420,13 +6253,13 @@
           <a:noFill/>
         </p:spPr>
         <p:txBody>
-          <a:bodyPr wrap="square">
+          <a:bodyPr wrap="none">
             <a:spAutoFit/>
           </a:bodyPr>
           <a:lstStyle/>
           <a:p>
             <a:r>
-              <a:rPr sz="1000" b="0">
+              <a:rPr sz="1000">
                 <a:solidFill>
                   <a:srgbClr val="5F6360"/>
                 </a:solidFill>
@@ -6542,7 +6375,7 @@
         <p:spPr>
           <a:xfrm>
             <a:off x="777240" y="1965960"/>
-            <a:ext cx="10607040" cy="4206240"/>
+            <a:ext cx="10607040" cy="1657350"/>
           </a:xfrm>
           <a:prstGeom prst="rect">
             <a:avLst/>
@@ -6555,39 +6388,35 @@
           </a:bodyPr>
           <a:lstStyle/>
           <a:p>
-            <a:pPr algn="l"/>
-            <a:r>
-              <a:rPr b="0" sz="2100">
+            <a:pPr>
+              <a:spcAft>
+                <a:spcPts val="1000"/>
+              </a:spcAft>
+            </a:pPr>
+            <a:r>
+              <a:rPr sz="2100" b="0">
                 <a:solidFill>
                   <a:srgbClr val="1C1C1A"/>
                 </a:solidFill>
                 <a:latin typeface="Calibri"/>
               </a:rPr>
-              <a:t>Saturday opens with a pen-and-paper recap paper drawn from the week's own interview question set. It runs for about two hours, it is AI-free by its format, and it is ungraded.</a:t>
-            </a:r>
-          </a:p>
-          <a:p>
-            <a:pPr algn="l"/>
-            <a:r>
-              <a:rPr b="0" sz="2100">
+              <a:t>Saturday opens with a pen-and-paper recap paper drawn from the week's own interview question set. It runs for about two hours, it is AI-free by format, and it is ungraded.</a:t>
+            </a:r>
+          </a:p>
+          <a:p>
+            <a:pPr>
+              <a:spcAft>
+                <a:spcPts val="1000"/>
+              </a:spcAft>
+            </a:pPr>
+            <a:r>
+              <a:rPr sz="2100" b="0">
                 <a:solidFill>
                   <a:srgbClr val="1C1C1A"/>
                 </a:solidFill>
                 <a:latin typeface="Calibri"/>
               </a:rPr>
-              <a:t> </a:t>
-            </a:r>
-          </a:p>
-          <a:p>
-            <a:pPr algn="l"/>
-            <a:r>
-              <a:rPr b="0" sz="2100">
-                <a:solidFill>
-                  <a:srgbClr val="1C1C1A"/>
-                </a:solidFill>
-                <a:latin typeface="Calibri"/>
-              </a:rPr>
-              <a:t>After a break, the Academic TA leads the solution discussion. Papers are swapped so that you cross-evaluate a peer's answers against the discussed solution, every answer is treated as an interview answer, and call-outs land at random throughout.</a:t>
+              <a:t>After a break, the Academic TA leads the solution discussion. Papers are swapped so you cross-evaluate a peer's answers, every answer is treated as an interview answer, and call-outs land at random.</a:t>
             </a:r>
           </a:p>
         </p:txBody>
@@ -6600,7 +6429,7 @@
         </p:nvSpPr>
         <p:spPr>
           <a:xfrm>
-            <a:off x="777240" y="6263640"/>
+            <a:off x="777240" y="6309360"/>
             <a:ext cx="10607040" cy="365760"/>
           </a:xfrm>
           <a:prstGeom prst="rect">
@@ -6609,13 +6438,13 @@
           <a:noFill/>
         </p:spPr>
         <p:txBody>
-          <a:bodyPr wrap="square">
+          <a:bodyPr wrap="none">
             <a:spAutoFit/>
           </a:bodyPr>
           <a:lstStyle/>
           <a:p>
             <a:r>
-              <a:rPr sz="1000" b="0">
+              <a:rPr sz="1000">
                 <a:solidFill>
                   <a:srgbClr val="5F6360"/>
                 </a:solidFill>
@@ -6731,7 +6560,7 @@
         <p:spPr>
           <a:xfrm>
             <a:off x="777240" y="1965960"/>
-            <a:ext cx="10607040" cy="4206240"/>
+            <a:ext cx="10607040" cy="2028825"/>
           </a:xfrm>
           <a:prstGeom prst="rect">
             <a:avLst/>
@@ -6744,9 +6573,13 @@
           </a:bodyPr>
           <a:lstStyle/>
           <a:p>
-            <a:pPr algn="l"/>
-            <a:r>
-              <a:rPr b="0" sz="2100">
+            <a:pPr>
+              <a:spcAft>
+                <a:spcPts val="1000"/>
+              </a:spcAft>
+            </a:pPr>
+            <a:r>
+              <a:rPr sz="2100" b="0">
                 <a:solidFill>
                   <a:srgbClr val="1C1C1A"/>
                 </a:solidFill>
@@ -6756,45 +6589,29 @@
             </a:r>
           </a:p>
           <a:p>
-            <a:pPr algn="l"/>
-            <a:r>
-              <a:rPr b="0" sz="2100">
+            <a:pPr>
+              <a:spcAft>
+                <a:spcPts val="1000"/>
+              </a:spcAft>
+            </a:pPr>
+            <a:r>
+              <a:rPr sz="2100" b="0">
                 <a:solidFill>
                   <a:srgbClr val="1C1C1A"/>
                 </a:solidFill>
                 <a:latin typeface="Calibri"/>
               </a:rPr>
-              <a:t> </a:t>
-            </a:r>
-          </a:p>
-          <a:p>
-            <a:pPr algn="l"/>
-            <a:r>
-              <a:rPr b="0" sz="2100">
-                <a:solidFill>
-                  <a:srgbClr val="1C1C1A"/>
-                </a:solidFill>
-                <a:latin typeface="Calibri"/>
-              </a:rPr>
               <a:t>You work in groups of four. Each build week carries five sub-problems, one drawn from each Kalpa unit, and three groups take each sub-problem, so the panel hears three views of the same business problem back to back.</a:t>
             </a:r>
           </a:p>
           <a:p>
-            <a:pPr algn="l"/>
-            <a:r>
-              <a:rPr b="0" sz="2100">
-                <a:solidFill>
-                  <a:srgbClr val="1C1C1A"/>
-                </a:solidFill>
-                <a:latin typeface="Calibri"/>
-              </a:rPr>
-              <a:t> </a:t>
-            </a:r>
-          </a:p>
-          <a:p>
-            <a:pPr algn="l"/>
-            <a:r>
-              <a:rPr b="0" sz="2100">
+            <a:pPr>
+              <a:spcAft>
+                <a:spcPts val="1000"/>
+              </a:spcAft>
+            </a:pPr>
+            <a:r>
+              <a:rPr sz="2100" b="0">
                 <a:solidFill>
                   <a:srgbClr val="1C1C1A"/>
                 </a:solidFill>
@@ -6813,7 +6630,7 @@
         </p:nvSpPr>
         <p:spPr>
           <a:xfrm>
-            <a:off x="777240" y="6263640"/>
+            <a:off x="777240" y="6309360"/>
             <a:ext cx="10607040" cy="365760"/>
           </a:xfrm>
           <a:prstGeom prst="rect">
@@ -6822,13 +6639,13 @@
           <a:noFill/>
         </p:spPr>
         <p:txBody>
-          <a:bodyPr wrap="square">
+          <a:bodyPr wrap="none">
             <a:spAutoFit/>
           </a:bodyPr>
           <a:lstStyle/>
           <a:p>
             <a:r>
-              <a:rPr sz="1000" b="0">
+              <a:rPr sz="1000">
                 <a:solidFill>
                   <a:srgbClr val="5F6360"/>
                 </a:solidFill>
@@ -6945,7 +6762,7 @@
         </p:nvGraphicFramePr>
         <p:xfrm>
           <a:off x="777240" y="1965960"/>
-          <a:ext cx="10607040" cy="3337560"/>
+          <a:ext cx="10607040" cy="1920240"/>
         </p:xfrm>
         <a:graphic>
           <a:graphicData uri="http://schemas.openxmlformats.org/drawingml/2006/table">
@@ -6954,10 +6771,10 @@
                 <a:tableStyleId>{5C22544A-7EE6-4342-B048-85BDC9FD1C3A}</a:tableStyleId>
               </a:tblPr>
               <a:tblGrid>
-                <a:gridCol w="2377440"/>
-                <a:gridCol w="8229600"/>
+                <a:gridCol w="5303520"/>
+                <a:gridCol w="5303520"/>
               </a:tblGrid>
-              <a:tr h="667512">
+              <a:tr h="384048">
                 <a:tc>
                   <a:txBody>
                     <a:bodyPr/>
@@ -6966,7 +6783,7 @@
                       <a:r>
                         <a:rPr sz="1300" b="1">
                           <a:solidFill>
-                            <a:srgbClr val="FFFFFF"/>
+                            <a:srgbClr val="2B4A7D"/>
                           </a:solidFill>
                           <a:latin typeface="Calibri"/>
                         </a:rPr>
@@ -6974,11 +6791,7 @@
                       </a:r>
                     </a:p>
                   </a:txBody>
-                  <a:tcPr marL="91440" marR="91440" marT="36576" marB="36576">
-                    <a:solidFill>
-                      <a:srgbClr val="2B4A7D"/>
-                    </a:solidFill>
-                  </a:tcPr>
+                  <a:tcPr marT="25400" marB="25400"/>
                 </a:tc>
                 <a:tc>
                   <a:txBody>
@@ -6988,7 +6801,7 @@
                       <a:r>
                         <a:rPr sz="1300" b="1">
                           <a:solidFill>
-                            <a:srgbClr val="FFFFFF"/>
+                            <a:srgbClr val="2B4A7D"/>
                           </a:solidFill>
                           <a:latin typeface="Calibri"/>
                         </a:rPr>
@@ -6996,21 +6809,17 @@
                       </a:r>
                     </a:p>
                   </a:txBody>
-                  <a:tcPr marL="91440" marR="91440" marT="36576" marB="36576">
-                    <a:solidFill>
-                      <a:srgbClr val="2B4A7D"/>
-                    </a:solidFill>
-                  </a:tcPr>
+                  <a:tcPr marT="25400" marB="25400"/>
                 </a:tc>
               </a:tr>
-              <a:tr h="667512">
+              <a:tr h="384048">
                 <a:tc>
                   <a:txBody>
                     <a:bodyPr/>
                     <a:lstStyle/>
                     <a:p>
                       <a:r>
-                        <a:rPr sz="1300" b="0">
+                        <a:rPr sz="1400" b="0">
                           <a:solidFill>
                             <a:srgbClr val="1C1C1A"/>
                           </a:solidFill>
@@ -7020,11 +6829,7 @@
                       </a:r>
                     </a:p>
                   </a:txBody>
-                  <a:tcPr marL="91440" marR="91440" marT="36576" marB="36576">
-                    <a:solidFill>
-                      <a:srgbClr val="F7F7F5"/>
-                    </a:solidFill>
-                  </a:tcPr>
+                  <a:tcPr marT="25400" marB="25400"/>
                 </a:tc>
                 <a:tc>
                   <a:txBody>
@@ -7032,7 +6837,7 @@
                     <a:lstStyle/>
                     <a:p>
                       <a:r>
-                        <a:rPr sz="1300" b="0">
+                        <a:rPr sz="1400" b="0">
                           <a:solidFill>
                             <a:srgbClr val="1C1C1A"/>
                           </a:solidFill>
@@ -7042,21 +6847,17 @@
                       </a:r>
                     </a:p>
                   </a:txBody>
-                  <a:tcPr marL="91440" marR="91440" marT="36576" marB="36576">
-                    <a:solidFill>
-                      <a:srgbClr val="F7F7F5"/>
-                    </a:solidFill>
-                  </a:tcPr>
+                  <a:tcPr marT="25400" marB="25400"/>
                 </a:tc>
               </a:tr>
-              <a:tr h="667512">
+              <a:tr h="384048">
                 <a:tc>
                   <a:txBody>
                     <a:bodyPr/>
                     <a:lstStyle/>
                     <a:p>
                       <a:r>
-                        <a:rPr sz="1300" b="0">
+                        <a:rPr sz="1400" b="0">
                           <a:solidFill>
                             <a:srgbClr val="1C1C1A"/>
                           </a:solidFill>
@@ -7066,11 +6867,7 @@
                       </a:r>
                     </a:p>
                   </a:txBody>
-                  <a:tcPr marL="91440" marR="91440" marT="36576" marB="36576">
-                    <a:solidFill>
-                      <a:srgbClr val="F7F7F5"/>
-                    </a:solidFill>
-                  </a:tcPr>
+                  <a:tcPr marT="25400" marB="25400"/>
                 </a:tc>
                 <a:tc>
                   <a:txBody>
@@ -7078,7 +6875,7 @@
                     <a:lstStyle/>
                     <a:p>
                       <a:r>
-                        <a:rPr sz="1300" b="0">
+                        <a:rPr sz="1400" b="0">
                           <a:solidFill>
                             <a:srgbClr val="1C1C1A"/>
                           </a:solidFill>
@@ -7088,21 +6885,17 @@
                       </a:r>
                     </a:p>
                   </a:txBody>
-                  <a:tcPr marL="91440" marR="91440" marT="36576" marB="36576">
-                    <a:solidFill>
-                      <a:srgbClr val="F7F7F5"/>
-                    </a:solidFill>
-                  </a:tcPr>
+                  <a:tcPr marT="25400" marB="25400"/>
                 </a:tc>
               </a:tr>
-              <a:tr h="667512">
+              <a:tr h="384048">
                 <a:tc>
                   <a:txBody>
                     <a:bodyPr/>
                     <a:lstStyle/>
                     <a:p>
                       <a:r>
-                        <a:rPr sz="1300" b="0">
+                        <a:rPr sz="1400" b="0">
                           <a:solidFill>
                             <a:srgbClr val="1C1C1A"/>
                           </a:solidFill>
@@ -7112,11 +6905,7 @@
                       </a:r>
                     </a:p>
                   </a:txBody>
-                  <a:tcPr marL="91440" marR="91440" marT="36576" marB="36576">
-                    <a:solidFill>
-                      <a:srgbClr val="F7F7F5"/>
-                    </a:solidFill>
-                  </a:tcPr>
+                  <a:tcPr marT="25400" marB="25400"/>
                 </a:tc>
                 <a:tc>
                   <a:txBody>
@@ -7124,7 +6913,7 @@
                     <a:lstStyle/>
                     <a:p>
                       <a:r>
-                        <a:rPr sz="1300" b="0">
+                        <a:rPr sz="1400" b="0">
                           <a:solidFill>
                             <a:srgbClr val="1C1C1A"/>
                           </a:solidFill>
@@ -7134,21 +6923,17 @@
                       </a:r>
                     </a:p>
                   </a:txBody>
-                  <a:tcPr marL="91440" marR="91440" marT="36576" marB="36576">
-                    <a:solidFill>
-                      <a:srgbClr val="F7F7F5"/>
-                    </a:solidFill>
-                  </a:tcPr>
+                  <a:tcPr marT="25400" marB="25400"/>
                 </a:tc>
               </a:tr>
-              <a:tr h="667512">
+              <a:tr h="384048">
                 <a:tc>
                   <a:txBody>
                     <a:bodyPr/>
                     <a:lstStyle/>
                     <a:p>
                       <a:r>
-                        <a:rPr sz="1300" b="0">
+                        <a:rPr sz="1400" b="0">
                           <a:solidFill>
                             <a:srgbClr val="1C1C1A"/>
                           </a:solidFill>
@@ -7158,11 +6943,7 @@
                       </a:r>
                     </a:p>
                   </a:txBody>
-                  <a:tcPr marL="91440" marR="91440" marT="36576" marB="36576">
-                    <a:solidFill>
-                      <a:srgbClr val="F7F7F5"/>
-                    </a:solidFill>
-                  </a:tcPr>
+                  <a:tcPr marT="25400" marB="25400"/>
                 </a:tc>
                 <a:tc>
                   <a:txBody>
@@ -7170,7 +6951,7 @@
                     <a:lstStyle/>
                     <a:p>
                       <a:r>
-                        <a:rPr sz="1300" b="0">
+                        <a:rPr sz="1400" b="0">
                           <a:solidFill>
                             <a:srgbClr val="1C1C1A"/>
                           </a:solidFill>
@@ -7180,11 +6961,7 @@
                       </a:r>
                     </a:p>
                   </a:txBody>
-                  <a:tcPr marL="91440" marR="91440" marT="36576" marB="36576">
-                    <a:solidFill>
-                      <a:srgbClr val="F7F7F5"/>
-                    </a:solidFill>
-                  </a:tcPr>
+                  <a:tcPr marT="25400" marB="25400"/>
                 </a:tc>
               </a:tr>
             </a:tbl>
@@ -7199,8 +6976,8 @@
         </p:nvSpPr>
         <p:spPr>
           <a:xfrm>
-            <a:off x="777240" y="5715000"/>
-            <a:ext cx="10607040" cy="457200"/>
+            <a:off x="777240" y="4069080"/>
+            <a:ext cx="10607040" cy="542925"/>
           </a:xfrm>
           <a:prstGeom prst="rect">
             <a:avLst/>
@@ -7213,8 +6990,13 @@
           </a:bodyPr>
           <a:lstStyle/>
           <a:p>
-            <a:r>
-              <a:rPr sz="1500" b="0">
+            <a:pPr>
+              <a:spcAft>
+                <a:spcPts val="1000"/>
+              </a:spcAft>
+            </a:pPr>
+            <a:r>
+              <a:rPr sz="2100" b="0">
                 <a:solidFill>
                   <a:srgbClr val="1C1C1A"/>
                 </a:solidFill>
@@ -7233,7 +7015,7 @@
         </p:nvSpPr>
         <p:spPr>
           <a:xfrm>
-            <a:off x="777240" y="6263640"/>
+            <a:off x="777240" y="6309360"/>
             <a:ext cx="10607040" cy="365760"/>
           </a:xfrm>
           <a:prstGeom prst="rect">
@@ -7242,13 +7024,13 @@
           <a:noFill/>
         </p:spPr>
         <p:txBody>
-          <a:bodyPr wrap="square">
+          <a:bodyPr wrap="none">
             <a:spAutoFit/>
           </a:bodyPr>
           <a:lstStyle/>
           <a:p>
             <a:r>
-              <a:rPr sz="1000" b="0">
+              <a:rPr sz="1000">
                 <a:solidFill>
                   <a:srgbClr val="5F6360"/>
                 </a:solidFill>
@@ -7364,7 +7146,7 @@
         <p:spPr>
           <a:xfrm>
             <a:off x="777240" y="1965960"/>
-            <a:ext cx="10607040" cy="4206240"/>
+            <a:ext cx="10607040" cy="1533525"/>
           </a:xfrm>
           <a:prstGeom prst="rect">
             <a:avLst/>
@@ -7377,9 +7159,13 @@
           </a:bodyPr>
           <a:lstStyle/>
           <a:p>
-            <a:pPr algn="l"/>
-            <a:r>
-              <a:rPr b="0" sz="2100">
+            <a:pPr>
+              <a:spcAft>
+                <a:spcPts val="1000"/>
+              </a:spcAft>
+            </a:pPr>
+            <a:r>
+              <a:rPr sz="2100" b="0">
                 <a:solidFill>
                   <a:srgbClr val="1C1C1A"/>
                 </a:solidFill>
@@ -7389,81 +7175,29 @@
             </a:r>
           </a:p>
           <a:p>
-            <a:pPr algn="l"/>
-            <a:r>
-              <a:rPr b="0" sz="2100">
+            <a:pPr>
+              <a:spcAft>
+                <a:spcPts val="1000"/>
+              </a:spcAft>
+            </a:pPr>
+            <a:r>
+              <a:rPr sz="2100" b="0">
                 <a:solidFill>
                   <a:srgbClr val="1C1C1A"/>
                 </a:solidFill>
                 <a:latin typeface="Calibri"/>
               </a:rPr>
-              <a:t> </a:t>
-            </a:r>
-          </a:p>
-          <a:p>
-            <a:pPr algn="l"/>
-            <a:r>
-              <a:rPr b="0" sz="2100">
-                <a:solidFill>
-                  <a:srgbClr val="1C1C1A"/>
-                </a:solidFill>
-                <a:latin typeface="Calibri"/>
-              </a:rPr>
-              <a:t>Python work lives in </a:t>
-            </a:r>
-            <a:r>
-              <a:rPr b="0" sz="1800">
-                <a:solidFill>
-                  <a:srgbClr val="2B4A7D"/>
-                </a:solidFill>
-                <a:latin typeface="Consolas"/>
-              </a:rPr>
-              <a:t>.ipynb</a:t>
-            </a:r>
-            <a:r>
-              <a:rPr b="0" sz="2100">
-                <a:solidFill>
-                  <a:srgbClr val="1C1C1A"/>
-                </a:solidFill>
-                <a:latin typeface="Calibri"/>
-              </a:rPr>
-              <a:t> notebooks. SQL work lives in </a:t>
-            </a:r>
-            <a:r>
-              <a:rPr b="0" sz="1800">
-                <a:solidFill>
-                  <a:srgbClr val="2B4A7D"/>
-                </a:solidFill>
-                <a:latin typeface="Consolas"/>
-              </a:rPr>
-              <a:t>.sql</a:t>
-            </a:r>
-            <a:r>
-              <a:rPr b="0" sz="2100">
-                <a:solidFill>
-                  <a:srgbClr val="1C1C1A"/>
-                </a:solidFill>
-                <a:latin typeface="Calibri"/>
-              </a:rPr>
-              <a:t> files run against Postgres.</a:t>
-            </a:r>
-          </a:p>
-          <a:p>
-            <a:pPr algn="l"/>
-            <a:r>
-              <a:rPr b="0" sz="2100">
-                <a:solidFill>
-                  <a:srgbClr val="1C1C1A"/>
-                </a:solidFill>
-                <a:latin typeface="Calibri"/>
-              </a:rPr>
-              <a:t> </a:t>
-            </a:r>
-          </a:p>
-          <a:p>
-            <a:pPr algn="l"/>
-            <a:r>
-              <a:rPr b="0" sz="2100">
+              <a:t>Python work lives in .ipynb notebooks. SQL work lives in .sql files run against Postgres.</a:t>
+            </a:r>
+          </a:p>
+          <a:p>
+            <a:pPr>
+              <a:spcAft>
+                <a:spcPts val="1000"/>
+              </a:spcAft>
+            </a:pPr>
+            <a:r>
+              <a:rPr sz="2100" b="0">
                 <a:solidFill>
                   <a:srgbClr val="1C1C1A"/>
                 </a:solidFill>
@@ -7482,7 +7216,7 @@
         </p:nvSpPr>
         <p:spPr>
           <a:xfrm>
-            <a:off x="777240" y="6263640"/>
+            <a:off x="777240" y="6309360"/>
             <a:ext cx="10607040" cy="365760"/>
           </a:xfrm>
           <a:prstGeom prst="rect">
@@ -7491,13 +7225,13 @@
           <a:noFill/>
         </p:spPr>
         <p:txBody>
-          <a:bodyPr wrap="square">
+          <a:bodyPr wrap="none">
             <a:spAutoFit/>
           </a:bodyPr>
           <a:lstStyle/>
           <a:p>
             <a:r>
-              <a:rPr sz="1000" b="0">
+              <a:rPr sz="1000">
                 <a:solidFill>
                   <a:srgbClr val="5F6360"/>
                 </a:solidFill>
@@ -7613,7 +7347,7 @@
         <p:spPr>
           <a:xfrm>
             <a:off x="777240" y="1965960"/>
-            <a:ext cx="10607040" cy="4206240"/>
+            <a:ext cx="10607040" cy="1781175"/>
           </a:xfrm>
           <a:prstGeom prst="rect">
             <a:avLst/>
@@ -7626,9 +7360,13 @@
           </a:bodyPr>
           <a:lstStyle/>
           <a:p>
-            <a:pPr algn="l"/>
-            <a:r>
-              <a:rPr b="0" sz="2100">
+            <a:pPr>
+              <a:spcAft>
+                <a:spcPts val="1000"/>
+              </a:spcAft>
+            </a:pPr>
+            <a:r>
+              <a:rPr sz="2100" b="0">
                 <a:solidFill>
                   <a:srgbClr val="1C1C1A"/>
                 </a:solidFill>
@@ -7638,45 +7376,29 @@
             </a:r>
           </a:p>
           <a:p>
-            <a:pPr algn="l"/>
-            <a:r>
-              <a:rPr b="0" sz="2100">
+            <a:pPr>
+              <a:spcAft>
+                <a:spcPts val="1000"/>
+              </a:spcAft>
+            </a:pPr>
+            <a:r>
+              <a:rPr sz="2100" b="0">
                 <a:solidFill>
                   <a:srgbClr val="1C1C1A"/>
                 </a:solidFill>
                 <a:latin typeface="Calibri"/>
               </a:rPr>
-              <a:t> </a:t>
-            </a:r>
-          </a:p>
-          <a:p>
-            <a:pPr algn="l"/>
-            <a:r>
-              <a:rPr b="0" sz="2100">
-                <a:solidFill>
-                  <a:srgbClr val="1C1C1A"/>
-                </a:solidFill>
-                <a:latin typeface="Calibri"/>
-              </a:rPr>
               <a:t>The Saturday recap paper is AI-free because it is written on paper.</a:t>
             </a:r>
           </a:p>
           <a:p>
-            <a:pPr algn="l"/>
-            <a:r>
-              <a:rPr b="0" sz="2100">
-                <a:solidFill>
-                  <a:srgbClr val="1C1C1A"/>
-                </a:solidFill>
-                <a:latin typeface="Calibri"/>
-              </a:rPr>
-              <a:t> </a:t>
-            </a:r>
-          </a:p>
-          <a:p>
-            <a:pPr algn="l"/>
-            <a:r>
-              <a:rPr b="0" sz="2100">
+            <a:pPr>
+              <a:spcAft>
+                <a:spcPts val="1000"/>
+              </a:spcAft>
+            </a:pPr>
+            <a:r>
+              <a:rPr sz="2100" b="0">
                 <a:solidFill>
                   <a:srgbClr val="1C1C1A"/>
                 </a:solidFill>
@@ -7695,7 +7417,7 @@
         </p:nvSpPr>
         <p:spPr>
           <a:xfrm>
-            <a:off x="777240" y="6263640"/>
+            <a:off x="777240" y="6309360"/>
             <a:ext cx="10607040" cy="365760"/>
           </a:xfrm>
           <a:prstGeom prst="rect">
@@ -7704,13 +7426,13 @@
           <a:noFill/>
         </p:spPr>
         <p:txBody>
-          <a:bodyPr wrap="square">
+          <a:bodyPr wrap="none">
             <a:spAutoFit/>
           </a:bodyPr>
           <a:lstStyle/>
           <a:p>
             <a:r>
-              <a:rPr sz="1000" b="0">
+              <a:rPr sz="1000">
                 <a:solidFill>
                   <a:srgbClr val="5F6360"/>
                 </a:solidFill>
@@ -7826,7 +7548,7 @@
         <p:spPr>
           <a:xfrm>
             <a:off x="777240" y="1965960"/>
-            <a:ext cx="10607040" cy="4206240"/>
+            <a:ext cx="10607040" cy="2400300"/>
           </a:xfrm>
           <a:prstGeom prst="rect">
             <a:avLst/>
@@ -7839,117 +7561,61 @@
           </a:bodyPr>
           <a:lstStyle/>
           <a:p>
-            <a:pPr algn="l"/>
-            <a:r>
-              <a:rPr b="0" sz="2100">
+            <a:pPr>
+              <a:spcAft>
+                <a:spcPts val="1000"/>
+              </a:spcAft>
+            </a:pPr>
+            <a:r>
+              <a:rPr sz="2100" b="0">
                 <a:solidFill>
                   <a:srgbClr val="1C1C1A"/>
                 </a:solidFill>
                 <a:latin typeface="Calibri"/>
               </a:rPr>
-              <a:t>Finish the take-home, </a:t>
-            </a:r>
-            <a:r>
-              <a:rPr b="0" sz="1800">
-                <a:solidFill>
-                  <a:srgbClr val="2B4A7D"/>
-                </a:solidFill>
-                <a:latin typeface="Consolas"/>
-              </a:rPr>
-              <a:t>C2_W01_D01_takehome_STUDENT.md</a:t>
-            </a:r>
-            <a:r>
-              <a:rPr b="0" sz="2100">
+              <a:t>Finish the take-home, C2_W01_D01_takehome_STUDENT.md. It extends today's counter into two buckets and asks you to explain the planted text amount in your own words.</a:t>
+            </a:r>
+          </a:p>
+          <a:p>
+            <a:pPr>
+              <a:spcAft>
+                <a:spcPts val="1000"/>
+              </a:spcAft>
+            </a:pPr>
+            <a:r>
+              <a:rPr sz="2100" b="0">
                 <a:solidFill>
                   <a:srgbClr val="1C1C1A"/>
                 </a:solidFill>
                 <a:latin typeface="Calibri"/>
               </a:rPr>
-              <a:t>. It extends today's counter to report two buckets, above and below the threshold, and it asks for one markdown cell explaining the planted text amount in your own words.</a:t>
-            </a:r>
-          </a:p>
-          <a:p>
-            <a:pPr algn="l"/>
-            <a:r>
-              <a:rPr b="0" sz="2100">
+              <a:t>Read the pre-read, C2_W01_D01_preread_STUDENT.md, and fill its gap sheet tonight. Tomorrow's first hour will feel like revision.</a:t>
+            </a:r>
+          </a:p>
+          <a:p>
+            <a:pPr>
+              <a:spcAft>
+                <a:spcPts val="1000"/>
+              </a:spcAft>
+            </a:pPr>
+            <a:r>
+              <a:rPr sz="2100" b="0">
                 <a:solidFill>
                   <a:srgbClr val="1C1C1A"/>
                 </a:solidFill>
                 <a:latin typeface="Calibri"/>
               </a:rPr>
-              <a:t> </a:t>
-            </a:r>
-          </a:p>
-          <a:p>
-            <a:pPr algn="l"/>
-            <a:r>
-              <a:rPr b="0" sz="2100">
-                <a:solidFill>
-                  <a:srgbClr val="1C1C1A"/>
-                </a:solidFill>
-                <a:latin typeface="Calibri"/>
-              </a:rPr>
-              <a:t>Read the pre-read, </a:t>
-            </a:r>
-            <a:r>
-              <a:rPr b="0" sz="1800">
-                <a:solidFill>
-                  <a:srgbClr val="2B4A7D"/>
-                </a:solidFill>
-                <a:latin typeface="Consolas"/>
-              </a:rPr>
-              <a:t>C2_W01_D01_preread_STUDENT.md</a:t>
-            </a:r>
-            <a:r>
-              <a:rPr b="0" sz="2100">
-                <a:solidFill>
-                  <a:srgbClr val="1C1C1A"/>
-                </a:solidFill>
-                <a:latin typeface="Calibri"/>
-              </a:rPr>
-              <a:t>, and fill its gap sheet before you sleep. Tomorrow's first hour will feel like revision.</a:t>
-            </a:r>
-          </a:p>
-          <a:p>
-            <a:pPr algn="l"/>
-            <a:r>
-              <a:rPr b="0" sz="2100">
-                <a:solidFill>
-                  <a:srgbClr val="1C1C1A"/>
-                </a:solidFill>
-                <a:latin typeface="Calibri"/>
-              </a:rPr>
-              <a:t> </a:t>
-            </a:r>
-          </a:p>
-          <a:p>
-            <a:pPr algn="l"/>
-            <a:r>
-              <a:rPr b="0" sz="2100">
-                <a:solidFill>
-                  <a:srgbClr val="1C1C1A"/>
-                </a:solidFill>
-                <a:latin typeface="Calibri"/>
-              </a:rPr>
               <a:t>Watch the dictionaries video on the student reference list: Corey Schafer, Dictionaries, video: link to be found.</a:t>
             </a:r>
           </a:p>
           <a:p>
-            <a:pPr algn="l"/>
-            <a:r>
-              <a:rPr b="0" sz="2100">
-                <a:solidFill>
-                  <a:srgbClr val="1C1C1A"/>
-                </a:solidFill>
-                <a:latin typeface="Calibri"/>
-              </a:rPr>
-              <a:t> </a:t>
-            </a:r>
-          </a:p>
-          <a:p>
-            <a:pPr algn="l"/>
-            <a:r>
-              <a:rPr b="0" sz="2100">
+            <a:pPr>
+              <a:spcAft>
+                <a:spcPts val="1000"/>
+              </a:spcAft>
+            </a:pPr>
+            <a:r>
+              <a:rPr sz="2100" b="0">
                 <a:solidFill>
                   <a:srgbClr val="1C1C1A"/>
                 </a:solidFill>
@@ -7968,7 +7634,7 @@
         </p:nvSpPr>
         <p:spPr>
           <a:xfrm>
-            <a:off x="777240" y="6263640"/>
+            <a:off x="777240" y="6309360"/>
             <a:ext cx="10607040" cy="365760"/>
           </a:xfrm>
           <a:prstGeom prst="rect">
@@ -7977,13 +7643,13 @@
           <a:noFill/>
         </p:spPr>
         <p:txBody>
-          <a:bodyPr wrap="square">
+          <a:bodyPr wrap="none">
             <a:spAutoFit/>
           </a:bodyPr>
           <a:lstStyle/>
           <a:p>
             <a:r>
-              <a:rPr sz="1000" b="0">
+              <a:rPr sz="1000">
                 <a:solidFill>
                   <a:srgbClr val="5F6360"/>
                 </a:solidFill>
@@ -8078,6 +7744,7 @@
           </a:bodyPr>
           <a:lstStyle/>
           <a:p>
+            <a:pPr algn="ctr"/>
             <a:r>
               <a:rPr sz="3600" b="1">
                 <a:solidFill>
@@ -8099,7 +7766,7 @@
         <p:spPr>
           <a:xfrm>
             <a:off x="777240" y="1965960"/>
-            <a:ext cx="10607040" cy="4206240"/>
+            <a:ext cx="10607040" cy="542925"/>
           </a:xfrm>
           <a:prstGeom prst="rect">
             <a:avLst/>
@@ -8112,22 +7779,26 @@
           </a:bodyPr>
           <a:lstStyle/>
           <a:p>
-            <a:pPr algn="l"/>
-            <a:r>
-              <a:rPr b="1" sz="1800">
+            <a:pPr algn="ctr">
+              <a:spcAft>
+                <a:spcPts val="1000"/>
+              </a:spcAft>
+            </a:pPr>
+            <a:r>
+              <a:rPr sz="2100" b="1">
                 <a:solidFill>
                   <a:srgbClr val="FFFFFF"/>
                 </a:solidFill>
-                <a:latin typeface="Consolas"/>
+                <a:latin typeface="Calibri"/>
               </a:rPr>
               <a:t>[the company]</a:t>
             </a:r>
             <a:r>
-              <a:rPr b="0" sz="1800">
+              <a:rPr sz="2100" b="0">
                 <a:solidFill>
                   <a:srgbClr val="FFFFFF"/>
                 </a:solidFill>
-                <a:latin typeface="Consolas"/>
+                <a:latin typeface="Calibri"/>
               </a:rPr>
               <a:t> &gt; [the journey] &gt; [the room]</a:t>
             </a:r>
@@ -8142,7 +7813,7 @@
         </p:nvSpPr>
         <p:spPr>
           <a:xfrm>
-            <a:off x="777240" y="6263640"/>
+            <a:off x="777240" y="6309360"/>
             <a:ext cx="10607040" cy="365760"/>
           </a:xfrm>
           <a:prstGeom prst="rect">
@@ -8151,13 +7822,13 @@
           <a:noFill/>
         </p:spPr>
         <p:txBody>
-          <a:bodyPr wrap="square">
+          <a:bodyPr wrap="none">
             <a:spAutoFit/>
           </a:bodyPr>
           <a:lstStyle/>
           <a:p>
             <a:r>
-              <a:rPr sz="1000" b="0">
+              <a:rPr sz="1000">
                 <a:solidFill>
                   <a:srgbClr val="5F6360"/>
                 </a:solidFill>
@@ -8273,7 +7944,7 @@
         <p:spPr>
           <a:xfrm>
             <a:off x="777240" y="1965960"/>
-            <a:ext cx="10607040" cy="4206240"/>
+            <a:ext cx="10607040" cy="1533525"/>
           </a:xfrm>
           <a:prstGeom prst="rect">
             <a:avLst/>
@@ -8286,9 +7957,13 @@
           </a:bodyPr>
           <a:lstStyle/>
           <a:p>
-            <a:pPr algn="l"/>
-            <a:r>
-              <a:rPr b="0" sz="2100">
+            <a:pPr>
+              <a:spcAft>
+                <a:spcPts val="1000"/>
+              </a:spcAft>
+            </a:pPr>
+            <a:r>
+              <a:rPr sz="2100" b="0">
                 <a:solidFill>
                   <a:srgbClr val="1C1C1A"/>
                 </a:solidFill>
@@ -8298,45 +7973,29 @@
             </a:r>
           </a:p>
           <a:p>
-            <a:pPr algn="l"/>
-            <a:r>
-              <a:rPr b="0" sz="2100">
+            <a:pPr>
+              <a:spcAft>
+                <a:spcPts val="1000"/>
+              </a:spcAft>
+            </a:pPr>
+            <a:r>
+              <a:rPr sz="2100" b="0">
                 <a:solidFill>
                   <a:srgbClr val="1C1C1A"/>
                 </a:solidFill>
                 <a:latin typeface="Calibri"/>
               </a:rPr>
-              <a:t> </a:t>
-            </a:r>
-          </a:p>
-          <a:p>
-            <a:pPr algn="l"/>
-            <a:r>
-              <a:rPr b="0" sz="2100">
-                <a:solidFill>
-                  <a:srgbClr val="1C1C1A"/>
-                </a:solidFill>
-                <a:latin typeface="Calibri"/>
-              </a:rPr>
               <a:t>Its largest engineering and data centre sits in Bengaluru.</a:t>
             </a:r>
           </a:p>
           <a:p>
-            <a:pPr algn="l"/>
-            <a:r>
-              <a:rPr b="0" sz="2100">
-                <a:solidFill>
-                  <a:srgbClr val="1C1C1A"/>
-                </a:solidFill>
-                <a:latin typeface="Calibri"/>
-              </a:rPr>
-              <a:t> </a:t>
-            </a:r>
-          </a:p>
-          <a:p>
-            <a:pPr algn="l"/>
-            <a:r>
-              <a:rPr b="0" sz="2100">
+            <a:pPr>
+              <a:spcAft>
+                <a:spcPts val="1000"/>
+              </a:spcAft>
+            </a:pPr>
+            <a:r>
+              <a:rPr sz="2100" b="0">
                 <a:solidFill>
                   <a:srgbClr val="1C1C1A"/>
                 </a:solidFill>
@@ -8355,7 +8014,7 @@
         </p:nvSpPr>
         <p:spPr>
           <a:xfrm>
-            <a:off x="777240" y="6263640"/>
+            <a:off x="777240" y="6309360"/>
             <a:ext cx="10607040" cy="365760"/>
           </a:xfrm>
           <a:prstGeom prst="rect">
@@ -8364,13 +8023,13 @@
           <a:noFill/>
         </p:spPr>
         <p:txBody>
-          <a:bodyPr wrap="square">
+          <a:bodyPr wrap="none">
             <a:spAutoFit/>
           </a:bodyPr>
           <a:lstStyle/>
           <a:p>
             <a:r>
-              <a:rPr sz="1000" b="0">
+              <a:rPr sz="1000">
                 <a:solidFill>
                   <a:srgbClr val="5F6360"/>
                 </a:solidFill>
@@ -8486,7 +8145,7 @@
         <p:spPr>
           <a:xfrm>
             <a:off x="777240" y="1965960"/>
-            <a:ext cx="10607040" cy="4206240"/>
+            <a:ext cx="10607040" cy="1781175"/>
           </a:xfrm>
           <a:prstGeom prst="rect">
             <a:avLst/>
@@ -8499,9 +8158,13 @@
           </a:bodyPr>
           <a:lstStyle/>
           <a:p>
-            <a:pPr algn="l"/>
-            <a:r>
-              <a:rPr b="0" sz="2100">
+            <a:pPr>
+              <a:spcAft>
+                <a:spcPts val="1000"/>
+              </a:spcAft>
+            </a:pPr>
+            <a:r>
+              <a:rPr sz="2100" b="0">
                 <a:solidFill>
                   <a:srgbClr val="1C1C1A"/>
                 </a:solidFill>
@@ -8511,45 +8174,29 @@
             </a:r>
           </a:p>
           <a:p>
-            <a:pPr algn="l"/>
-            <a:r>
-              <a:rPr b="0" sz="2100">
+            <a:pPr>
+              <a:spcAft>
+                <a:spcPts val="1000"/>
+              </a:spcAft>
+            </a:pPr>
+            <a:r>
+              <a:rPr sz="2100" b="0">
                 <a:solidFill>
                   <a:srgbClr val="1C1C1A"/>
                 </a:solidFill>
                 <a:latin typeface="Calibri"/>
               </a:rPr>
-              <a:t> </a:t>
-            </a:r>
-          </a:p>
-          <a:p>
-            <a:pPr algn="l"/>
-            <a:r>
-              <a:rPr b="0" sz="2100">
-                <a:solidFill>
-                  <a:srgbClr val="1C1C1A"/>
-                </a:solidFill>
-                <a:latin typeface="Calibri"/>
-              </a:rPr>
               <a:t>Each business unit owns its own operations. The Bengaluru centre owns the data, the models and the AI systems that every unit runs on.</a:t>
             </a:r>
           </a:p>
           <a:p>
-            <a:pPr algn="l"/>
-            <a:r>
-              <a:rPr b="0" sz="2100">
-                <a:solidFill>
-                  <a:srgbClr val="1C1C1A"/>
-                </a:solidFill>
-                <a:latin typeface="Calibri"/>
-              </a:rPr>
-              <a:t> </a:t>
-            </a:r>
-          </a:p>
-          <a:p>
-            <a:pPr algn="l"/>
-            <a:r>
-              <a:rPr b="0" sz="2100">
+            <a:pPr>
+              <a:spcAft>
+                <a:spcPts val="1000"/>
+              </a:spcAft>
+            </a:pPr>
+            <a:r>
+              <a:rPr sz="2100" b="0">
                 <a:solidFill>
                   <a:srgbClr val="1C1C1A"/>
                 </a:solidFill>
@@ -8568,7 +8215,7 @@
         </p:nvSpPr>
         <p:spPr>
           <a:xfrm>
-            <a:off x="777240" y="6263640"/>
+            <a:off x="777240" y="6309360"/>
             <a:ext cx="10607040" cy="365760"/>
           </a:xfrm>
           <a:prstGeom prst="rect">
@@ -8577,13 +8224,13 @@
           <a:noFill/>
         </p:spPr>
         <p:txBody>
-          <a:bodyPr wrap="square">
+          <a:bodyPr wrap="none">
             <a:spAutoFit/>
           </a:bodyPr>
           <a:lstStyle/>
           <a:p>
             <a:r>
-              <a:rPr sz="1000" b="0">
+              <a:rPr sz="1000">
                 <a:solidFill>
                   <a:srgbClr val="5F6360"/>
                 </a:solidFill>
@@ -8698,8 +8345,8 @@
         </p:nvSpPr>
         <p:spPr>
           <a:xfrm>
-            <a:off x="777240" y="1645920"/>
-            <a:ext cx="10607040" cy="548640"/>
+            <a:off x="777240" y="1691640"/>
+            <a:ext cx="10607040" cy="502920"/>
           </a:xfrm>
           <a:prstGeom prst="rect">
             <a:avLst/>
@@ -9243,7 +8890,7 @@
         </p:nvSpPr>
         <p:spPr>
           <a:xfrm>
-            <a:off x="777240" y="6263640"/>
+            <a:off x="777240" y="6309360"/>
             <a:ext cx="10607040" cy="365760"/>
           </a:xfrm>
           <a:prstGeom prst="rect">
@@ -9252,13 +8899,13 @@
           <a:noFill/>
         </p:spPr>
         <p:txBody>
-          <a:bodyPr wrap="square">
+          <a:bodyPr wrap="none">
             <a:spAutoFit/>
           </a:bodyPr>
           <a:lstStyle/>
           <a:p>
             <a:r>
-              <a:rPr sz="1000" b="0">
+              <a:rPr sz="1000">
                 <a:solidFill>
                   <a:srgbClr val="5F6360"/>
                 </a:solidFill>
@@ -9374,7 +9021,7 @@
         <p:spPr>
           <a:xfrm>
             <a:off x="777240" y="1965960"/>
-            <a:ext cx="10607040" cy="4206240"/>
+            <a:ext cx="10607040" cy="2028825"/>
           </a:xfrm>
           <a:prstGeom prst="rect">
             <a:avLst/>
@@ -9387,9 +9034,13 @@
           </a:bodyPr>
           <a:lstStyle/>
           <a:p>
-            <a:pPr algn="l"/>
-            <a:r>
-              <a:rPr b="0" sz="2100">
+            <a:pPr>
+              <a:spcAft>
+                <a:spcPts val="1000"/>
+              </a:spcAft>
+            </a:pPr>
+            <a:r>
+              <a:rPr sz="2100" b="0">
                 <a:solidFill>
                   <a:srgbClr val="1C1C1A"/>
                 </a:solidFill>
@@ -9399,45 +9050,29 @@
             </a:r>
           </a:p>
           <a:p>
-            <a:pPr algn="l"/>
-            <a:r>
-              <a:rPr b="0" sz="2100">
+            <a:pPr>
+              <a:spcAft>
+                <a:spcPts val="1000"/>
+              </a:spcAft>
+            </a:pPr>
+            <a:r>
+              <a:rPr sz="2100" b="0">
                 <a:solidFill>
                   <a:srgbClr val="1C1C1A"/>
                 </a:solidFill>
                 <a:latin typeface="Calibri"/>
               </a:rPr>
-              <a:t> </a:t>
-            </a:r>
-          </a:p>
-          <a:p>
-            <a:pPr algn="l"/>
-            <a:r>
-              <a:rPr b="0" sz="2100">
-                <a:solidFill>
-                  <a:srgbClr val="1C1C1A"/>
-                </a:solidFill>
-                <a:latin typeface="Calibri"/>
-              </a:rPr>
               <a:t>Build weeks tour the other four units, one sub-problem per unit, so you meet fraud, delivery times, no-shows and churn inside the same company.</a:t>
             </a:r>
           </a:p>
           <a:p>
-            <a:pPr algn="l"/>
-            <a:r>
-              <a:rPr b="0" sz="2100">
-                <a:solidFill>
-                  <a:srgbClr val="1C1C1A"/>
-                </a:solidFill>
-                <a:latin typeface="Calibri"/>
-              </a:rPr>
-              <a:t> </a:t>
-            </a:r>
-          </a:p>
-          <a:p>
-            <a:pPr algn="l"/>
-            <a:r>
-              <a:rPr b="0" sz="2100">
+            <a:pPr>
+              <a:spcAft>
+                <a:spcPts val="1000"/>
+              </a:spcAft>
+            </a:pPr>
+            <a:r>
+              <a:rPr sz="2100" b="0">
                 <a:solidFill>
                   <a:srgbClr val="1C1C1A"/>
                 </a:solidFill>
@@ -9456,7 +9091,7 @@
         </p:nvSpPr>
         <p:spPr>
           <a:xfrm>
-            <a:off x="777240" y="6263640"/>
+            <a:off x="777240" y="6309360"/>
             <a:ext cx="10607040" cy="365760"/>
           </a:xfrm>
           <a:prstGeom prst="rect">
@@ -9465,13 +9100,13 @@
           <a:noFill/>
         </p:spPr>
         <p:txBody>
-          <a:bodyPr wrap="square">
+          <a:bodyPr wrap="none">
             <a:spAutoFit/>
           </a:bodyPr>
           <a:lstStyle/>
           <a:p>
             <a:r>
-              <a:rPr sz="1000" b="0">
+              <a:rPr sz="1000">
                 <a:solidFill>
                   <a:srgbClr val="5F6360"/>
                 </a:solidFill>
@@ -9586,8 +9221,8 @@
         </p:nvSpPr>
         <p:spPr>
           <a:xfrm>
-            <a:off x="777240" y="1645920"/>
-            <a:ext cx="10607040" cy="548640"/>
+            <a:off x="777240" y="1691640"/>
+            <a:ext cx="10607040" cy="502920"/>
           </a:xfrm>
           <a:prstGeom prst="rect">
             <a:avLst/>
@@ -10300,7 +9935,7 @@
         </p:nvSpPr>
         <p:spPr>
           <a:xfrm>
-            <a:off x="777240" y="6263640"/>
+            <a:off x="777240" y="6309360"/>
             <a:ext cx="10607040" cy="365760"/>
           </a:xfrm>
           <a:prstGeom prst="rect">
@@ -10309,13 +9944,13 @@
           <a:noFill/>
         </p:spPr>
         <p:txBody>
-          <a:bodyPr wrap="square">
+          <a:bodyPr wrap="none">
             <a:spAutoFit/>
           </a:bodyPr>
           <a:lstStyle/>
           <a:p>
             <a:r>
-              <a:rPr sz="1000" b="0">
+              <a:rPr sz="1000">
                 <a:solidFill>
                   <a:srgbClr val="5F6360"/>
                 </a:solidFill>
@@ -10431,7 +10066,7 @@
         <p:spPr>
           <a:xfrm>
             <a:off x="777240" y="1965960"/>
-            <a:ext cx="10607040" cy="4206240"/>
+            <a:ext cx="10607040" cy="2895600"/>
           </a:xfrm>
           <a:prstGeom prst="rect">
             <a:avLst/>
@@ -10444,9 +10079,13 @@
           </a:bodyPr>
           <a:lstStyle/>
           <a:p>
-            <a:pPr algn="l"/>
-            <a:r>
-              <a:rPr b="0" sz="2100">
+            <a:pPr>
+              <a:spcAft>
+                <a:spcPts val="1000"/>
+              </a:spcAft>
+            </a:pPr>
+            <a:r>
+              <a:rPr sz="2100" b="0">
                 <a:solidFill>
                   <a:srgbClr val="1C1C1A"/>
                 </a:solidFill>
@@ -10456,117 +10095,77 @@
             </a:r>
           </a:p>
           <a:p>
-            <a:pPr algn="l"/>
-            <a:r>
-              <a:rPr b="0" sz="2100">
+            <a:pPr>
+              <a:spcAft>
+                <a:spcPts val="1000"/>
+              </a:spcAft>
+            </a:pPr>
+            <a:r>
+              <a:rPr sz="2100" b="0">
                 <a:solidFill>
                   <a:srgbClr val="1C1C1A"/>
                 </a:solidFill>
                 <a:latin typeface="Calibri"/>
               </a:rPr>
-              <a:t> </a:t>
-            </a:r>
-          </a:p>
-          <a:p>
-            <a:pPr algn="l"/>
-            <a:r>
-              <a:rPr b="0" sz="2100">
+              <a:t>ORDERS holds one row per order, with its date, its amount in Rs and its status.</a:t>
+            </a:r>
+          </a:p>
+          <a:p>
+            <a:pPr>
+              <a:spcAft>
+                <a:spcPts val="1000"/>
+              </a:spcAft>
+            </a:pPr>
+            <a:r>
+              <a:rPr sz="2100" b="0">
                 <a:solidFill>
                   <a:srgbClr val="1C1C1A"/>
                 </a:solidFill>
                 <a:latin typeface="Calibri"/>
               </a:rPr>
-              <a:t>ORDERS holds one row per order, with its date, its amount in Rs and its status.</a:t>
-            </a:r>
-          </a:p>
-          <a:p>
-            <a:pPr algn="l"/>
-            <a:r>
-              <a:rPr b="0" sz="2100">
+              <a:t>ORDER_ITEMS holds one row per product inside an order, with the quantity ordered.</a:t>
+            </a:r>
+          </a:p>
+          <a:p>
+            <a:pPr>
+              <a:spcAft>
+                <a:spcPts val="1000"/>
+              </a:spcAft>
+            </a:pPr>
+            <a:r>
+              <a:rPr sz="2100" b="0">
                 <a:solidFill>
                   <a:srgbClr val="1C1C1A"/>
                 </a:solidFill>
                 <a:latin typeface="Calibri"/>
               </a:rPr>
-              <a:t> </a:t>
-            </a:r>
-          </a:p>
-          <a:p>
-            <a:pPr algn="l"/>
-            <a:r>
-              <a:rPr b="0" sz="2100">
+              <a:t>PAYMENTS holds one row per payment that settles an order, with the amount actually paid.</a:t>
+            </a:r>
+          </a:p>
+          <a:p>
+            <a:pPr>
+              <a:spcAft>
+                <a:spcPts val="1000"/>
+              </a:spcAft>
+            </a:pPr>
+            <a:r>
+              <a:rPr sz="2100" b="0">
                 <a:solidFill>
                   <a:srgbClr val="1C1C1A"/>
                 </a:solidFill>
                 <a:latin typeface="Calibri"/>
               </a:rPr>
-              <a:t>ORDER_ITEMS holds one row per product inside an order, with the quantity ordered.</a:t>
-            </a:r>
-          </a:p>
-          <a:p>
-            <a:pPr algn="l"/>
-            <a:r>
-              <a:rPr b="0" sz="2100">
-                <a:solidFill>
-                  <a:srgbClr val="1C1C1A"/>
-                </a:solidFill>
-                <a:latin typeface="Calibri"/>
-              </a:rPr>
-              <a:t> </a:t>
-            </a:r>
-          </a:p>
-          <a:p>
-            <a:pPr algn="l"/>
-            <a:r>
-              <a:rPr b="0" sz="2100">
-                <a:solidFill>
-                  <a:srgbClr val="1C1C1A"/>
-                </a:solidFill>
-                <a:latin typeface="Calibri"/>
-              </a:rPr>
-              <a:t>PAYMENTS holds one row per payment that settles an order, with the amount actually paid.</a:t>
-            </a:r>
-          </a:p>
-          <a:p>
-            <a:pPr algn="l"/>
-            <a:r>
-              <a:rPr b="0" sz="2100">
-                <a:solidFill>
-                  <a:srgbClr val="1C1C1A"/>
-                </a:solidFill>
-                <a:latin typeface="Calibri"/>
-              </a:rPr>
-              <a:t> </a:t>
-            </a:r>
-          </a:p>
-          <a:p>
-            <a:pPr algn="l"/>
-            <a:r>
-              <a:rPr b="0" sz="2100">
-                <a:solidFill>
-                  <a:srgbClr val="1C1C1A"/>
-                </a:solidFill>
-                <a:latin typeface="Calibri"/>
-              </a:rPr>
               <a:t>PRODUCTS holds one row per product, with its category and its list price.</a:t>
             </a:r>
           </a:p>
           <a:p>
-            <a:pPr algn="l"/>
-            <a:r>
-              <a:rPr b="0" sz="2100">
-                <a:solidFill>
-                  <a:srgbClr val="1C1C1A"/>
-                </a:solidFill>
-                <a:latin typeface="Calibri"/>
-              </a:rPr>
-              <a:t> </a:t>
-            </a:r>
-          </a:p>
-          <a:p>
-            <a:pPr algn="l"/>
-            <a:r>
-              <a:rPr b="0" sz="2100">
+            <a:pPr>
+              <a:spcAft>
+                <a:spcPts val="1000"/>
+              </a:spcAft>
+            </a:pPr>
+            <a:r>
+              <a:rPr sz="2100" b="0">
                 <a:solidFill>
                   <a:srgbClr val="1C1C1A"/>
                 </a:solidFill>
@@ -10585,7 +10184,7 @@
         </p:nvSpPr>
         <p:spPr>
           <a:xfrm>
-            <a:off x="777240" y="6263640"/>
+            <a:off x="777240" y="6309360"/>
             <a:ext cx="10607040" cy="365760"/>
           </a:xfrm>
           <a:prstGeom prst="rect">
@@ -10594,13 +10193,13 @@
           <a:noFill/>
         </p:spPr>
         <p:txBody>
-          <a:bodyPr wrap="square">
+          <a:bodyPr wrap="none">
             <a:spAutoFit/>
           </a:bodyPr>
           <a:lstStyle/>
           <a:p>
             <a:r>
-              <a:rPr sz="1000" b="0">
+              <a:rPr sz="1000">
                 <a:solidFill>
                   <a:srgbClr val="5F6360"/>
                 </a:solidFill>
